--- a/slides/03-development-workflows.pptx
+++ b/slides/03-development-workflows.pptx
@@ -915,91 +915,91 @@
 </file>
 
 <file path=ppt/notesSlides/notesSlide14.xml><?xml version="1.0" encoding="utf-8"?>
-<p:notes xmlns:a="http://schemas.openxmlformats.org/drawingml/2006/main" xmlns:r="http://schemas.openxmlformats.org/officeDocument/2006/relationships" xmlns:p="http://schemas.openxmlformats.org/presentationml/2006/main">
-  <p:cSld>
-    <p:spTree>
-      <p:nvGrpSpPr>
-        <p:cNvPr id="1" name=""/>
-        <p:cNvGrpSpPr/>
-        <p:nvPr/>
-      </p:nvGrpSpPr>
-      <p:grpSpPr>
-        <a:xfrm>
-          <a:off x="0" y="0"/>
-          <a:ext cx="0" cy="0"/>
-          <a:chOff x="0" y="0"/>
-          <a:chExt cx="0" cy="0"/>
-        </a:xfrm>
-      </p:grpSpPr>
-      <p:sp>
-        <p:nvSpPr>
-          <p:cNvPr id="2" name="Slide Image Placeholder 1"/>
-          <p:cNvSpPr>
-            <a:spLocks noGrp="1" noRot="1" noChangeAspect="1"/>
-          </p:cNvSpPr>
-          <p:nvPr>
-            <p:ph type="sldImg"/>
-          </p:nvPr>
-        </p:nvSpPr>
-        <p:spPr/>
-      </p:sp>
-      <p:sp>
-        <p:nvSpPr>
-          <p:cNvPr id="3" name="Notes Placeholder 2"/>
-          <p:cNvSpPr>
-            <a:spLocks noGrp="1"/>
-          </p:cNvSpPr>
-          <p:nvPr>
-            <p:ph type="body" idx="1"/>
-          </p:nvPr>
-        </p:nvSpPr>
-        <p:spPr/>
-        <p:txBody>
-          <a:bodyPr/>
-          <a:lstStyle/>
-          <a:p>
-            <a:r>
-              <a:rPr lang="en-US" dirty="0"/>
-              <a:t>The Issues and Pull requests views in the sidebar list GitHub work that involves you. Select Issues and stay on Assigned to me. Select All repositories at the top, then your fork. The view now lists only the practice issues. Do the same in Pull requests; each view keeps its own repository selection, and the practice PRs appear on Authored by me. You can also filter with a query: select the filter icon and add repo:OWNER/copilot-app-for-beginners. A typed query resets when you change tabs, so the picker is easier.</a:t>
-            </a:r>
-            <a:endParaRPr lang="en-US" dirty="0"/>
-          </a:p>
-        </p:txBody>
-      </p:sp>
-      <p:sp>
-        <p:nvSpPr>
-          <p:cNvPr id="4" name="Slide Number Placeholder 3"/>
-          <p:cNvSpPr>
-            <a:spLocks noGrp="1"/>
-          </p:cNvSpPr>
-          <p:nvPr>
-            <p:ph type="sldNum" sz="quarter" idx="10"/>
-          </p:nvPr>
-        </p:nvSpPr>
-        <p:spPr/>
-        <p:txBody>
-          <a:bodyPr/>
-          <a:lstStyle/>
-          <a:p>
-            <a:fld id="{F7021451-1387-4CA6-816F-3879F97B5CBC}" type="slidenum">
-              <a:rPr lang="en-US"/>
-              <a:t>14</a:t>
-            </a:fld>
-            <a:endParaRPr lang="en-US"/>
-          </a:p>
-        </p:txBody>
-      </p:sp>
-    </p:spTree>
-    <p:extLst>
-      <p:ext uri="{BB962C8B-B14F-4D97-AF65-F5344CB8AC3E}">
-        <p14:creationId xmlns:p14="http://schemas.microsoft.com/office/powerpoint/2010/main" val="1024086991"/>
-      </p:ext>
-    </p:extLst>
-  </p:cSld>
-  <p:clrMapOvr>
-    <a:masterClrMapping/>
-  </p:clrMapOvr>
-</p:notes>
+<ns0:notes xmlns:ns0="http://schemas.openxmlformats.org/presentationml/2006/main" xmlns:ns1="http://schemas.openxmlformats.org/drawingml/2006/main" xmlns:ns2="http://schemas.microsoft.com/office/powerpoint/2010/main">
+  <ns0:cSld>
+    <ns0:spTree>
+      <ns0:nvGrpSpPr>
+        <ns0:cNvPr id="1" name=""/>
+        <ns0:cNvGrpSpPr/>
+        <ns0:nvPr/>
+      </ns0:nvGrpSpPr>
+      <ns0:grpSpPr>
+        <ns1:xfrm>
+          <ns1:off x="0" y="0"/>
+          <ns1:ext cx="0" cy="0"/>
+          <ns1:chOff x="0" y="0"/>
+          <ns1:chExt cx="0" cy="0"/>
+        </ns1:xfrm>
+      </ns0:grpSpPr>
+      <ns0:sp>
+        <ns0:nvSpPr>
+          <ns0:cNvPr id="2" name="Slide Image Placeholder 1"/>
+          <ns0:cNvSpPr>
+            <ns1:spLocks noGrp="1" noRot="1" noChangeAspect="1"/>
+          </ns0:cNvSpPr>
+          <ns0:nvPr>
+            <ns0:ph type="sldImg"/>
+          </ns0:nvPr>
+        </ns0:nvSpPr>
+        <ns0:spPr/>
+      </ns0:sp>
+      <ns0:sp>
+        <ns0:nvSpPr>
+          <ns0:cNvPr id="3" name="Notes Placeholder 2"/>
+          <ns0:cNvSpPr>
+            <ns1:spLocks noGrp="1"/>
+          </ns0:cNvSpPr>
+          <ns0:nvPr>
+            <ns0:ph type="body" idx="1"/>
+          </ns0:nvPr>
+        </ns0:nvSpPr>
+        <ns0:spPr/>
+        <ns0:txBody>
+          <ns1:bodyPr/>
+          <ns1:lstStyle/>
+          <ns1:p>
+            <ns1:r>
+              <ns1:rPr lang="en-US" dirty="0"/>
+              <ns1:t>The Issues and Pull requests views list GitHub work that involves you. Select Issues and stay on Assigned to me. Select the filter icon, choose query mode, and enter repo:OWNER/copilot-app-for-beginners, replacing OWNER with your GitHub username. The query can also include state:open assignee:@me. Do the same in Pull requests, where state:open author:@me finds your open practice PRs. Each view has its own query. The repository picker has been replaced by query filtering.</ns1:t>
+            </ns1:r>
+            <ns1:endParaRPr lang="en-US" dirty="0"/>
+          </ns1:p>
+        </ns0:txBody>
+      </ns0:sp>
+      <ns0:sp>
+        <ns0:nvSpPr>
+          <ns0:cNvPr id="4" name="Slide Number Placeholder 3"/>
+          <ns0:cNvSpPr>
+            <ns1:spLocks noGrp="1"/>
+          </ns0:cNvSpPr>
+          <ns0:nvPr>
+            <ns0:ph type="sldNum" sz="quarter" idx="10"/>
+          </ns0:nvPr>
+        </ns0:nvSpPr>
+        <ns0:spPr/>
+        <ns0:txBody>
+          <ns1:bodyPr/>
+          <ns1:lstStyle/>
+          <ns1:p>
+            <ns1:fld id="{F7021451-1387-4CA6-816F-3879F97B5CBC}" type="slidenum">
+              <ns1:rPr lang="en-US"/>
+              <ns1:t>14</ns1:t>
+            </ns1:fld>
+            <ns1:endParaRPr lang="en-US"/>
+          </ns1:p>
+        </ns0:txBody>
+      </ns0:sp>
+    </ns0:spTree>
+    <ns0:extLst>
+      <ns0:ext uri="{BB962C8B-B14F-4D97-AF65-F5344CB8AC3E}">
+        <ns2:creationId val="1024086991"/>
+      </ns0:ext>
+    </ns0:extLst>
+  </ns0:cSld>
+  <ns0:clrMapOvr>
+    <ns1:masterClrMapping/>
+  </ns0:clrMapOvr>
+</ns0:notes>
 </file>
 
 <file path=ppt/notesSlides/notesSlide15.xml><?xml version="1.0" encoding="utf-8"?>
@@ -4245,7 +4245,7 @@
       </p:sp>
       <p:pic>
         <p:nvPicPr>
-          <p:cNvPr id="10" name="Image 2" descr="Pick &amp; Polish with an article.book-card attachment in the prompt box">    </p:cNvPr>
+          <p:cNvPr id="10" name="Image 2" descr="Pick &amp; Polish with an article.book-card attachment in the prompt box"/>
           <p:cNvPicPr>
             <a:picLocks noChangeAspect="1"/>
           </p:cNvPicPr>
@@ -4794,7 +4794,7 @@
       </p:sp>
       <p:pic>
         <p:nvPicPr>
-          <p:cNvPr id="24" name="Image 3" descr="Pick &amp; Polish with an article.book-card attachment in the prompt box">    </p:cNvPr>
+          <p:cNvPr id="24" name="Image 3" descr="Pick &amp; Polish with an article.book-card attachment in the prompt box"/>
           <p:cNvPicPr>
             <a:picLocks noChangeAspect="1"/>
           </p:cNvPicPr>
@@ -5525,7 +5525,7 @@
       </p:sp>
       <p:pic>
         <p:nvPicPr>
-          <p:cNvPr id="9" name="Image 2" descr="Issue-to-merge workflow: issue, session, diff, approval gate, pull request, checks, approval gate, and merge. Feedback or a failed check goes back to the session.">    </p:cNvPr>
+          <p:cNvPr id="9" name="Image 2" descr="Issue-to-merge workflow: issue, session, diff, approval gate, pull request, checks, approval gate, and merge. Feedback or a failed check goes back to the session."/>
           <p:cNvPicPr>
             <a:picLocks noChangeAspect="1"/>
           </p:cNvPicPr>
@@ -5556,769 +5556,769 @@
 </file>
 
 <file path=ppt/slides/slide14.xml><?xml version="1.0" encoding="utf-8"?>
-<p:sld xmlns:a="http://schemas.openxmlformats.org/drawingml/2006/main" xmlns:r="http://schemas.openxmlformats.org/officeDocument/2006/relationships" xmlns:p="http://schemas.openxmlformats.org/presentationml/2006/main">
-  <p:cSld name="Slide 14">
-    <p:bg>
-      <p:bgPr>
-        <a:solidFill>
-          <a:srgbClr val="FFFFFF"/>
-        </a:solidFill>
-      </p:bgPr>
-    </p:bg>
-    <p:spTree>
-      <p:nvGrpSpPr>
-        <p:cNvPr id="1" name=""/>
-        <p:cNvGrpSpPr/>
-        <p:nvPr/>
-      </p:nvGrpSpPr>
-      <p:grpSpPr>
-        <a:xfrm>
-          <a:off x="0" y="0"/>
-          <a:ext cx="0" cy="0"/>
-          <a:chOff x="0" y="0"/>
-          <a:chExt cx="0" cy="0"/>
-        </a:xfrm>
-      </p:grpSpPr>
-      <p:pic>
-        <p:nvPicPr>
-          <p:cNvPr id="2" name="Image 0" descr="">
-            <a:extLst>
-              <a:ext uri="{C183D7F6-B498-43B3-948B-1728B52AA6E4}">
-                <adec:decorative xmlns:adec="http://schemas.microsoft.com/office/drawing/2017/decorative" val="1"/>
-              </a:ext>
-            </a:extLst>
-          </p:cNvPr>
-          <p:cNvPicPr>
-            <a:picLocks noChangeAspect="1"/>
-          </p:cNvPicPr>
-          <p:nvPr/>
-        </p:nvPicPr>
-        <p:blipFill>
-          <a:blip r:embed="rId1"/>
-          <a:stretch>
-            <a:fillRect/>
-          </a:stretch>
-        </p:blipFill>
-        <p:spPr>
-          <a:xfrm>
-            <a:off x="6349901" y="0"/>
-            <a:ext cx="2793950" cy="1308050"/>
-          </a:xfrm>
-          <a:prstGeom prst="rect">
-            <a:avLst/>
-          </a:prstGeom>
-        </p:spPr>
-      </p:pic>
-      <p:sp>
-        <p:nvSpPr>
-          <p:cNvPr id="3" name="Text 0"/>
-          <p:cNvSpPr/>
-          <p:nvPr/>
-        </p:nvSpPr>
-        <p:spPr>
-          <a:xfrm>
-            <a:off x="7340501" y="177701"/>
-            <a:ext cx="1168301" cy="279350"/>
-          </a:xfrm>
-          <a:prstGeom prst="roundRect">
-            <a:avLst>
-              <a:gd name="adj" fmla="val 22731"/>
-            </a:avLst>
-          </a:prstGeom>
-          <a:solidFill>
-            <a:srgbClr val="1A7F37"/>
-          </a:solidFill>
-          <a:ln/>
-        </p:spPr>
-        <p:txBody>
-          <a:bodyPr wrap="square" rtlCol="0" anchor="ctr"/>
-          <a:lstStyle/>
-          <a:p>
-            <a:pPr indent="0" marL="0">
-              <a:buNone/>
-            </a:pPr>
-            <a:endParaRPr lang="en-US" dirty="0"/>
-          </a:p>
-        </p:txBody>
-      </p:sp>
-      <p:sp>
-        <p:nvSpPr>
-          <p:cNvPr id="4" name="Text 1"/>
-          <p:cNvSpPr/>
-          <p:nvPr/>
-        </p:nvSpPr>
-        <p:spPr>
-          <a:xfrm>
-            <a:off x="7461041" y="231577"/>
-            <a:ext cx="927071" cy="171450"/>
-          </a:xfrm>
-          <a:prstGeom prst="rect">
-            <a:avLst/>
-          </a:prstGeom>
-          <a:noFill/>
-          <a:ln/>
-        </p:spPr>
-        <p:txBody>
-          <a:bodyPr wrap="square" lIns="0" tIns="0" rIns="0" bIns="0" rtlCol="0" anchor="t"/>
-          <a:lstStyle/>
-          <a:p>
-            <a:pPr algn="ctr" indent="0" marL="0">
-              <a:buNone/>
-            </a:pPr>
-            <a:r>
-              <a:rPr lang="en-US" sz="1150" b="1" dirty="0">
-                <a:solidFill>
-                  <a:srgbClr val="FFFFFF"/>
-                </a:solidFill>
-                <a:latin typeface="Arial" pitchFamily="34" charset="0"/>
-                <a:ea typeface="Arial" pitchFamily="34" charset="-122"/>
-                <a:cs typeface="Arial" pitchFamily="34" charset="-120"/>
-              </a:rPr>
-              <a:t>CHAPTER 03</a:t>
-            </a:r>
-            <a:endParaRPr lang="en-US" sz="1150" dirty="0"/>
-          </a:p>
-        </p:txBody>
-      </p:sp>
-      <p:pic>
-        <p:nvPicPr>
-          <p:cNvPr id="5" name="Image 1" descr="Open this chapter on GitHub">
-            <a:hlinkClick r:id="rId3" tooltip="https://github.com/github/copilot-app-for-beginners/tree/main/03-development-workflows"/>
-          </p:cNvPr>
-          <p:cNvPicPr>
-            <a:picLocks noChangeAspect="1"/>
-          </p:cNvPicPr>
-          <p:nvPr/>
-        </p:nvPicPr>
-        <p:blipFill>
-          <a:blip r:embed="rId2"/>
-          <a:stretch>
-            <a:fillRect/>
-          </a:stretch>
-        </p:blipFill>
-        <p:spPr>
-          <a:xfrm>
-            <a:off x="8610600" y="165050"/>
-            <a:ext cx="304800" cy="304800"/>
-          </a:xfrm>
-          <a:prstGeom prst="rect">
-            <a:avLst/>
-          </a:prstGeom>
-        </p:spPr>
-      </p:pic>
-      <p:sp>
-        <p:nvSpPr>
-          <p:cNvPr id="6" name="Text 2"/>
-          <p:cNvSpPr/>
-          <p:nvPr/>
-        </p:nvSpPr>
-        <p:spPr>
-          <a:xfrm>
-            <a:off x="507950" y="381000"/>
-            <a:ext cx="8161020" cy="190500"/>
-          </a:xfrm>
-          <a:prstGeom prst="rect">
-            <a:avLst/>
-          </a:prstGeom>
-          <a:noFill/>
-          <a:ln/>
-        </p:spPr>
-        <p:txBody>
-          <a:bodyPr wrap="square" lIns="0" tIns="0" rIns="0" bIns="0" rtlCol="0" anchor="t"/>
-          <a:lstStyle/>
-          <a:p>
-            <a:pPr algn="l" indent="0" marL="0">
-              <a:buNone/>
-            </a:pPr>
-            <a:r>
-              <a:rPr lang="en-US" sz="1250" b="1" dirty="0">
-                <a:solidFill>
-                  <a:srgbClr val="8250DF"/>
-                </a:solidFill>
-                <a:latin typeface="Arial" pitchFamily="34" charset="0"/>
-                <a:ea typeface="Arial" pitchFamily="34" charset="-122"/>
-                <a:cs typeface="Arial" pitchFamily="34" charset="-120"/>
-              </a:rPr>
-              <a:t>ISSUES AND PULL REQUESTS</a:t>
-            </a:r>
-            <a:endParaRPr lang="en-US" sz="1250" dirty="0"/>
-          </a:p>
-        </p:txBody>
-      </p:sp>
-      <p:sp>
-        <p:nvSpPr>
-          <p:cNvPr id="7" name="Text 3"/>
-          <p:cNvSpPr/>
-          <p:nvPr/>
-        </p:nvSpPr>
-        <p:spPr>
-          <a:xfrm>
-            <a:off x="507950" y="622250"/>
-            <a:ext cx="8161020" cy="419100"/>
-          </a:xfrm>
-          <a:prstGeom prst="rect">
-            <a:avLst/>
-          </a:prstGeom>
-          <a:noFill/>
-          <a:ln/>
-        </p:spPr>
-        <p:txBody>
-          <a:bodyPr wrap="square" lIns="0" tIns="0" rIns="0" bIns="0" rtlCol="0" anchor="t"/>
-          <a:lstStyle/>
-          <a:p>
-            <a:pPr algn="l" indent="0" marL="0">
-              <a:lnSpc>
-                <a:spcPts val="3300"/>
-              </a:lnSpc>
-              <a:spcBef>
-                <a:spcPts val="400"/>
-              </a:spcBef>
-              <a:buNone/>
-            </a:pPr>
-            <a:r>
-              <a:rPr lang="en-US" sz="2800" b="1" dirty="0">
-                <a:solidFill>
-                  <a:srgbClr val="1F2328"/>
-                </a:solidFill>
-                <a:latin typeface="Arial" pitchFamily="34" charset="0"/>
-                <a:ea typeface="Arial" pitchFamily="34" charset="-122"/>
-                <a:cs typeface="Arial" pitchFamily="34" charset="-120"/>
-              </a:rPr>
-              <a:t>Find the course work</a:t>
-            </a:r>
-            <a:endParaRPr lang="en-US" sz="2800" dirty="0"/>
-          </a:p>
-        </p:txBody>
-      </p:sp>
-      <p:sp>
-        <p:nvSpPr>
-          <p:cNvPr id="8" name="Text 4"/>
-          <p:cNvSpPr/>
-          <p:nvPr/>
-        </p:nvSpPr>
-        <p:spPr>
-          <a:xfrm>
-            <a:off x="507950" y="1104751"/>
-            <a:ext cx="8161020" cy="254050"/>
-          </a:xfrm>
-          <a:prstGeom prst="rect">
-            <a:avLst/>
-          </a:prstGeom>
-          <a:noFill/>
-          <a:ln/>
-        </p:spPr>
-        <p:txBody>
-          <a:bodyPr wrap="square" lIns="0" tIns="0" rIns="0" bIns="0" rtlCol="0" anchor="t"/>
-          <a:lstStyle/>
-          <a:p>
-            <a:pPr algn="l" indent="0" marL="0">
-              <a:lnSpc>
-                <a:spcPts val="2000"/>
-              </a:lnSpc>
-              <a:spcBef>
-                <a:spcPts val="500"/>
-              </a:spcBef>
-              <a:buNone/>
-            </a:pPr>
-            <a:r>
-              <a:rPr lang="en-US" sz="1650" dirty="0">
-                <a:solidFill>
-                  <a:srgbClr val="59636E"/>
-                </a:solidFill>
-                <a:latin typeface="Arial" pitchFamily="34" charset="0"/>
-                <a:ea typeface="Arial" pitchFamily="34" charset="-122"/>
-                <a:cs typeface="Arial" pitchFamily="34" charset="-120"/>
-              </a:rPr>
-              <a:t>Pick your fork in each view's repository picker.</a:t>
-            </a:r>
-            <a:endParaRPr lang="en-US" sz="1650" dirty="0"/>
-          </a:p>
-        </p:txBody>
-      </p:sp>
-      <p:sp>
-        <p:nvSpPr>
-          <p:cNvPr id="9" name="Text 5"/>
-          <p:cNvSpPr/>
-          <p:nvPr/>
-        </p:nvSpPr>
-        <p:spPr>
-          <a:xfrm>
-            <a:off x="507950" y="1604814"/>
-            <a:ext cx="279350" cy="279350"/>
-          </a:xfrm>
-          <a:prstGeom prst="roundRect">
-            <a:avLst>
-              <a:gd name="adj" fmla="val 327331"/>
-            </a:avLst>
-          </a:prstGeom>
-          <a:solidFill>
-            <a:srgbClr val="8250DF"/>
-          </a:solidFill>
-          <a:ln/>
-        </p:spPr>
-        <p:txBody>
-          <a:bodyPr wrap="square" rtlCol="0" anchor="ctr"/>
-          <a:lstStyle/>
-          <a:p>
-            <a:pPr indent="0" marL="0">
-              <a:buNone/>
-            </a:pPr>
-            <a:endParaRPr lang="en-US" dirty="0"/>
-          </a:p>
-        </p:txBody>
-      </p:sp>
-      <p:sp>
-        <p:nvSpPr>
-          <p:cNvPr id="10" name="Text 6"/>
-          <p:cNvSpPr/>
-          <p:nvPr/>
-        </p:nvSpPr>
-        <p:spPr>
-          <a:xfrm>
-            <a:off x="602615" y="1649164"/>
-            <a:ext cx="90020" cy="190500"/>
-          </a:xfrm>
-          <a:prstGeom prst="rect">
-            <a:avLst/>
-          </a:prstGeom>
-          <a:noFill/>
-          <a:ln/>
-        </p:spPr>
-        <p:txBody>
-          <a:bodyPr wrap="square" lIns="0" tIns="0" rIns="0" bIns="0" rtlCol="0" anchor="t"/>
-          <a:lstStyle/>
-          <a:p>
-            <a:pPr algn="ctr" indent="0" marL="0">
-              <a:buNone/>
-            </a:pPr>
-            <a:r>
-              <a:rPr lang="en-US" sz="1250" b="1" dirty="0">
-                <a:solidFill>
-                  <a:srgbClr val="FFFFFF"/>
-                </a:solidFill>
-                <a:latin typeface="Arial" pitchFamily="34" charset="0"/>
-                <a:ea typeface="Arial" pitchFamily="34" charset="-122"/>
-                <a:cs typeface="Arial" pitchFamily="34" charset="-120"/>
-              </a:rPr>
-              <a:t>1</a:t>
-            </a:r>
-            <a:endParaRPr lang="en-US" sz="1250" dirty="0"/>
-          </a:p>
-        </p:txBody>
-      </p:sp>
-      <p:sp>
-        <p:nvSpPr>
-          <p:cNvPr id="11" name="Text 7"/>
-          <p:cNvSpPr/>
-          <p:nvPr/>
-        </p:nvSpPr>
-        <p:spPr>
-          <a:xfrm>
-            <a:off x="939701" y="1604814"/>
-            <a:ext cx="2798064" cy="222200"/>
-          </a:xfrm>
-          <a:prstGeom prst="rect">
-            <a:avLst/>
-          </a:prstGeom>
-          <a:noFill/>
-          <a:ln/>
-        </p:spPr>
-        <p:txBody>
-          <a:bodyPr wrap="square" lIns="0" tIns="0" rIns="0" bIns="0" rtlCol="0" anchor="t"/>
-          <a:lstStyle/>
-          <a:p>
-            <a:pPr algn="l" indent="0" marL="0">
-              <a:lnSpc>
-                <a:spcPts val="1750"/>
-              </a:lnSpc>
-              <a:buNone/>
-            </a:pPr>
-            <a:r>
-              <a:rPr lang="en-US" sz="1550" b="1" dirty="0">
-                <a:solidFill>
-                  <a:srgbClr val="1F2328"/>
-                </a:solidFill>
-                <a:latin typeface="Arial" pitchFamily="34" charset="0"/>
-                <a:ea typeface="Arial" pitchFamily="34" charset="-122"/>
-                <a:cs typeface="Arial" pitchFamily="34" charset="-120"/>
-              </a:rPr>
-              <a:t>Issues &gt; Assigned to me</a:t>
-            </a:r>
-            <a:endParaRPr lang="en-US" sz="1550" dirty="0"/>
-          </a:p>
-        </p:txBody>
-      </p:sp>
-      <p:sp>
-        <p:nvSpPr>
-          <p:cNvPr id="12" name="Text 8"/>
-          <p:cNvSpPr/>
-          <p:nvPr/>
-        </p:nvSpPr>
-        <p:spPr>
-          <a:xfrm>
-            <a:off x="939701" y="1852315"/>
-            <a:ext cx="2798064" cy="396180"/>
-          </a:xfrm>
-          <a:prstGeom prst="rect">
-            <a:avLst/>
-          </a:prstGeom>
-          <a:noFill/>
-          <a:ln/>
-        </p:spPr>
-        <p:txBody>
-          <a:bodyPr wrap="square" lIns="0" tIns="0" rIns="0" bIns="0" rtlCol="0" anchor="t"/>
-          <a:lstStyle/>
-          <a:p>
-            <a:pPr algn="l" indent="0" marL="0">
-              <a:lnSpc>
-                <a:spcPts val="1560"/>
-              </a:lnSpc>
-              <a:buNone/>
-            </a:pPr>
-            <a:r>
-              <a:rPr lang="en-US" sz="1350" dirty="0">
-                <a:solidFill>
-                  <a:srgbClr val="59636E"/>
-                </a:solidFill>
-                <a:latin typeface="Arial" pitchFamily="34" charset="0"/>
-                <a:ea typeface="Arial" pitchFamily="34" charset="-122"/>
-                <a:cs typeface="Arial" pitchFamily="34" charset="-120"/>
-              </a:rPr>
-              <a:t>Select </a:t>
-            </a:r>
-            <a:pPr algn="l" indent="0" marL="0">
-              <a:lnSpc>
-                <a:spcPts val="1560"/>
-              </a:lnSpc>
-              <a:buNone/>
-            </a:pPr>
-            <a:r>
-              <a:rPr lang="en-US" sz="1350" b="1" dirty="0">
-                <a:solidFill>
-                  <a:srgbClr val="59636E"/>
-                </a:solidFill>
-                <a:latin typeface="Arial" pitchFamily="34" charset="0"/>
-                <a:ea typeface="Arial" pitchFamily="34" charset="-122"/>
-                <a:cs typeface="Arial" pitchFamily="34" charset="-120"/>
-              </a:rPr>
-              <a:t>All repositories</a:t>
-            </a:r>
-            <a:pPr algn="l" indent="0" marL="0">
-              <a:lnSpc>
-                <a:spcPts val="1560"/>
-              </a:lnSpc>
-              <a:buNone/>
-            </a:pPr>
-            <a:r>
-              <a:rPr lang="en-US" sz="1350" dirty="0">
-                <a:solidFill>
-                  <a:srgbClr val="59636E"/>
-                </a:solidFill>
-                <a:latin typeface="Arial" pitchFamily="34" charset="0"/>
-                <a:ea typeface="Arial" pitchFamily="34" charset="-122"/>
-                <a:cs typeface="Arial" pitchFamily="34" charset="-120"/>
-              </a:rPr>
-              <a:t>, then your fork.</a:t>
-            </a:r>
-            <a:endParaRPr lang="en-US" sz="1350" dirty="0"/>
-          </a:p>
-        </p:txBody>
-      </p:sp>
-      <p:sp>
-        <p:nvSpPr>
-          <p:cNvPr id="13" name="Text 9"/>
-          <p:cNvSpPr/>
-          <p:nvPr/>
-        </p:nvSpPr>
-        <p:spPr>
-          <a:xfrm>
-            <a:off x="507950" y="2451646"/>
-            <a:ext cx="279350" cy="279350"/>
-          </a:xfrm>
-          <a:prstGeom prst="roundRect">
-            <a:avLst>
-              <a:gd name="adj" fmla="val 327331"/>
-            </a:avLst>
-          </a:prstGeom>
-          <a:solidFill>
-            <a:srgbClr val="8250DF"/>
-          </a:solidFill>
-          <a:ln/>
-        </p:spPr>
-        <p:txBody>
-          <a:bodyPr wrap="square" rtlCol="0" anchor="ctr"/>
-          <a:lstStyle/>
-          <a:p>
-            <a:pPr indent="0" marL="0">
-              <a:buNone/>
-            </a:pPr>
-            <a:endParaRPr lang="en-US" dirty="0"/>
-          </a:p>
-        </p:txBody>
-      </p:sp>
-      <p:sp>
-        <p:nvSpPr>
-          <p:cNvPr id="14" name="Text 10"/>
-          <p:cNvSpPr/>
-          <p:nvPr/>
-        </p:nvSpPr>
-        <p:spPr>
-          <a:xfrm>
-            <a:off x="602615" y="2495996"/>
-            <a:ext cx="90020" cy="190500"/>
-          </a:xfrm>
-          <a:prstGeom prst="rect">
-            <a:avLst/>
-          </a:prstGeom>
-          <a:noFill/>
-          <a:ln/>
-        </p:spPr>
-        <p:txBody>
-          <a:bodyPr wrap="square" lIns="0" tIns="0" rIns="0" bIns="0" rtlCol="0" anchor="t"/>
-          <a:lstStyle/>
-          <a:p>
-            <a:pPr algn="ctr" indent="0" marL="0">
-              <a:buNone/>
-            </a:pPr>
-            <a:r>
-              <a:rPr lang="en-US" sz="1250" b="1" dirty="0">
-                <a:solidFill>
-                  <a:srgbClr val="FFFFFF"/>
-                </a:solidFill>
-                <a:latin typeface="Arial" pitchFamily="34" charset="0"/>
-                <a:ea typeface="Arial" pitchFamily="34" charset="-122"/>
-                <a:cs typeface="Arial" pitchFamily="34" charset="-120"/>
-              </a:rPr>
-              <a:t>2</a:t>
-            </a:r>
-            <a:endParaRPr lang="en-US" sz="1250" dirty="0"/>
-          </a:p>
-        </p:txBody>
-      </p:sp>
-      <p:sp>
-        <p:nvSpPr>
-          <p:cNvPr id="15" name="Text 11"/>
-          <p:cNvSpPr/>
-          <p:nvPr/>
-        </p:nvSpPr>
-        <p:spPr>
-          <a:xfrm>
-            <a:off x="939701" y="2451646"/>
-            <a:ext cx="2798064" cy="444401"/>
-          </a:xfrm>
-          <a:prstGeom prst="rect">
-            <a:avLst/>
-          </a:prstGeom>
-          <a:noFill/>
-          <a:ln/>
-        </p:spPr>
-        <p:txBody>
-          <a:bodyPr wrap="square" lIns="0" tIns="0" rIns="0" bIns="0" rtlCol="0" anchor="t"/>
-          <a:lstStyle/>
-          <a:p>
-            <a:pPr algn="l" indent="0" marL="0">
-              <a:lnSpc>
-                <a:spcPts val="1750"/>
-              </a:lnSpc>
-              <a:buNone/>
-            </a:pPr>
-            <a:r>
-              <a:rPr lang="en-US" sz="1550" b="1" dirty="0">
-                <a:solidFill>
-                  <a:srgbClr val="1F2328"/>
-                </a:solidFill>
-                <a:latin typeface="Arial" pitchFamily="34" charset="0"/>
-                <a:ea typeface="Arial" pitchFamily="34" charset="-122"/>
-                <a:cs typeface="Arial" pitchFamily="34" charset="-120"/>
-              </a:rPr>
-              <a:t>Pull requests &gt; Authored by me</a:t>
-            </a:r>
-            <a:endParaRPr lang="en-US" sz="1550" dirty="0"/>
-          </a:p>
-        </p:txBody>
-      </p:sp>
-      <p:sp>
-        <p:nvSpPr>
-          <p:cNvPr id="16" name="Text 12"/>
-          <p:cNvSpPr/>
-          <p:nvPr/>
-        </p:nvSpPr>
-        <p:spPr>
-          <a:xfrm>
-            <a:off x="939701" y="2921347"/>
-            <a:ext cx="2798064" cy="198090"/>
-          </a:xfrm>
-          <a:prstGeom prst="rect">
-            <a:avLst/>
-          </a:prstGeom>
-          <a:noFill/>
-          <a:ln/>
-        </p:spPr>
-        <p:txBody>
-          <a:bodyPr wrap="square" lIns="0" tIns="0" rIns="0" bIns="0" rtlCol="0" anchor="t"/>
-          <a:lstStyle/>
-          <a:p>
-            <a:pPr algn="l" indent="0" marL="0">
-              <a:lnSpc>
-                <a:spcPts val="1560"/>
-              </a:lnSpc>
-              <a:buNone/>
-            </a:pPr>
-            <a:r>
-              <a:rPr lang="en-US" sz="1350" dirty="0">
-                <a:solidFill>
-                  <a:srgbClr val="59636E"/>
-                </a:solidFill>
-                <a:latin typeface="Arial" pitchFamily="34" charset="0"/>
-                <a:ea typeface="Arial" pitchFamily="34" charset="-122"/>
-                <a:cs typeface="Arial" pitchFamily="34" charset="-120"/>
-              </a:rPr>
-              <a:t>Pick your fork there too.</a:t>
-            </a:r>
-            <a:endParaRPr lang="en-US" sz="1350" dirty="0"/>
-          </a:p>
-        </p:txBody>
-      </p:sp>
-      <p:sp>
-        <p:nvSpPr>
-          <p:cNvPr id="17" name="Text 13"/>
-          <p:cNvSpPr/>
-          <p:nvPr/>
-        </p:nvSpPr>
-        <p:spPr>
-          <a:xfrm>
-            <a:off x="507950" y="3325713"/>
-            <a:ext cx="2870150" cy="1212800"/>
-          </a:xfrm>
-          <a:prstGeom prst="roundRect">
-            <a:avLst>
-              <a:gd name="adj" fmla="val 6283"/>
-            </a:avLst>
-          </a:prstGeom>
-          <a:solidFill>
-            <a:srgbClr val="FFFFFF"/>
-          </a:solidFill>
-          <a:ln w="9525">
-            <a:solidFill>
-              <a:srgbClr val="D1D9E0"/>
-            </a:solidFill>
-          </a:ln>
-          <a:effectLst>
-            <a:outerShdw sx="100000" sy="100000" kx="0" ky="0" algn="bl" rotWithShape="0" blurRad="38100" dist="9525" dir="5400000">
-              <a:srgbClr val="1f2328">
-                <a:alpha val="12000"/>
-              </a:srgbClr>
-            </a:outerShdw>
-          </a:effectLst>
-        </p:spPr>
-        <p:txBody>
-          <a:bodyPr wrap="square" rtlCol="0" anchor="ctr"/>
-          <a:lstStyle/>
-          <a:p>
-            <a:pPr indent="0" marL="0">
-              <a:buNone/>
-            </a:pPr>
-            <a:endParaRPr lang="en-US" dirty="0"/>
-          </a:p>
-        </p:txBody>
-      </p:sp>
-      <p:pic>
-        <p:nvPicPr>
-          <p:cNvPr id="18" name="Image 2" descr="Issues repository picker with callouts for All repositories and the course repository">    </p:cNvPr>
-          <p:cNvPicPr>
-            <a:picLocks noChangeAspect="1"/>
-          </p:cNvPicPr>
-          <p:nvPr/>
-        </p:nvPicPr>
-        <p:blipFill>
-          <a:blip r:embed="rId4"/>
-          <a:stretch>
-            <a:fillRect/>
-          </a:stretch>
-        </p:blipFill>
-        <p:spPr>
-          <a:xfrm>
-            <a:off x="555575" y="3373338"/>
-            <a:ext cx="2774900" cy="1117550"/>
-          </a:xfrm>
-          <a:prstGeom prst="rect">
-            <a:avLst/>
-          </a:prstGeom>
-        </p:spPr>
-      </p:pic>
-      <p:sp>
-        <p:nvSpPr>
-          <p:cNvPr id="19" name="Text 14"/>
-          <p:cNvSpPr/>
-          <p:nvPr/>
-        </p:nvSpPr>
-        <p:spPr>
-          <a:xfrm>
-            <a:off x="3939927" y="2078236"/>
-            <a:ext cx="4692551" cy="1989981"/>
-          </a:xfrm>
-          <a:prstGeom prst="roundRect">
-            <a:avLst>
-              <a:gd name="adj" fmla="val 3829"/>
-            </a:avLst>
-          </a:prstGeom>
-          <a:solidFill>
-            <a:srgbClr val="FFFFFF"/>
-          </a:solidFill>
-          <a:ln w="9525">
-            <a:solidFill>
-              <a:srgbClr val="D1D9E0"/>
-            </a:solidFill>
-          </a:ln>
-          <a:effectLst>
-            <a:outerShdw sx="100000" sy="100000" kx="0" ky="0" algn="bl" rotWithShape="0" blurRad="38100" dist="9525" dir="5400000">
-              <a:srgbClr val="1f2328">
-                <a:alpha val="12000"/>
-              </a:srgbClr>
-            </a:outerShdw>
-          </a:effectLst>
-        </p:spPr>
-        <p:txBody>
-          <a:bodyPr wrap="square" rtlCol="0" anchor="ctr"/>
-          <a:lstStyle/>
-          <a:p>
-            <a:pPr indent="0" marL="0">
-              <a:buNone/>
-            </a:pPr>
-            <a:endParaRPr lang="en-US" dirty="0"/>
-          </a:p>
-        </p:txBody>
-      </p:sp>
-      <p:pic>
-        <p:nvPicPr>
-          <p:cNvPr id="20" name="Image 3" descr="Issues view filtered to the course repository">    </p:cNvPr>
-          <p:cNvPicPr>
-            <a:picLocks noChangeAspect="1"/>
-          </p:cNvPicPr>
-          <p:nvPr/>
-        </p:nvPicPr>
-        <p:blipFill>
-          <a:blip r:embed="rId5"/>
-          <a:stretch>
-            <a:fillRect/>
-          </a:stretch>
-        </p:blipFill>
-        <p:spPr>
-          <a:xfrm>
-            <a:off x="3987552" y="2125861"/>
-            <a:ext cx="4597301" cy="1894731"/>
-          </a:xfrm>
-          <a:prstGeom prst="rect">
-            <a:avLst/>
-          </a:prstGeom>
-        </p:spPr>
-      </p:pic>
-    </p:spTree>
-  </p:cSld>
-  <p:clrMapOvr>
-    <a:masterClrMapping/>
-  </p:clrMapOvr>
-</p:sld>
+<ns0:sld xmlns:ns0="http://schemas.openxmlformats.org/presentationml/2006/main" xmlns:ns1="http://schemas.openxmlformats.org/drawingml/2006/main" xmlns:ns2="http://schemas.microsoft.com/office/drawing/2017/decorative" xmlns:ns3="http://schemas.openxmlformats.org/officeDocument/2006/relationships">
+  <ns0:cSld name="Slide 14">
+    <ns0:bg>
+      <ns0:bgPr>
+        <ns1:solidFill>
+          <ns1:srgbClr val="FFFFFF"/>
+        </ns1:solidFill>
+      </ns0:bgPr>
+    </ns0:bg>
+    <ns0:spTree>
+      <ns0:nvGrpSpPr>
+        <ns0:cNvPr id="1" name=""/>
+        <ns0:cNvGrpSpPr/>
+        <ns0:nvPr/>
+      </ns0:nvGrpSpPr>
+      <ns0:grpSpPr>
+        <ns1:xfrm>
+          <ns1:off x="0" y="0"/>
+          <ns1:ext cx="0" cy="0"/>
+          <ns1:chOff x="0" y="0"/>
+          <ns1:chExt cx="0" cy="0"/>
+        </ns1:xfrm>
+      </ns0:grpSpPr>
+      <ns0:pic>
+        <ns0:nvPicPr>
+          <ns0:cNvPr id="2" name="Image 0" descr="">
+            <ns1:extLst>
+              <ns1:ext uri="{C183D7F6-B498-43B3-948B-1728B52AA6E4}">
+                <ns2:decorative val="1"/>
+              </ns1:ext>
+            </ns1:extLst>
+          </ns0:cNvPr>
+          <ns0:cNvPicPr>
+            <ns1:picLocks noChangeAspect="1"/>
+          </ns0:cNvPicPr>
+          <ns0:nvPr/>
+        </ns0:nvPicPr>
+        <ns0:blipFill>
+          <ns1:blip ns3:embed="rId1"/>
+          <ns1:stretch>
+            <ns1:fillRect/>
+          </ns1:stretch>
+        </ns0:blipFill>
+        <ns0:spPr>
+          <ns1:xfrm>
+            <ns1:off x="6349901" y="0"/>
+            <ns1:ext cx="2793950" cy="1308050"/>
+          </ns1:xfrm>
+          <ns1:prstGeom prst="rect">
+            <ns1:avLst/>
+          </ns1:prstGeom>
+        </ns0:spPr>
+      </ns0:pic>
+      <ns0:sp>
+        <ns0:nvSpPr>
+          <ns0:cNvPr id="3" name="Text 0"/>
+          <ns0:cNvSpPr/>
+          <ns0:nvPr/>
+        </ns0:nvSpPr>
+        <ns0:spPr>
+          <ns1:xfrm>
+            <ns1:off x="7340501" y="177701"/>
+            <ns1:ext cx="1168301" cy="279350"/>
+          </ns1:xfrm>
+          <ns1:prstGeom prst="roundRect">
+            <ns1:avLst>
+              <ns1:gd name="adj" fmla="val 22731"/>
+            </ns1:avLst>
+          </ns1:prstGeom>
+          <ns1:solidFill>
+            <ns1:srgbClr val="1A7F37"/>
+          </ns1:solidFill>
+          <ns1:ln/>
+        </ns0:spPr>
+        <ns0:txBody>
+          <ns1:bodyPr wrap="square" rtlCol="0" anchor="ctr"/>
+          <ns1:lstStyle/>
+          <ns1:p>
+            <ns1:pPr indent="0" marL="0">
+              <ns1:buNone/>
+            </ns1:pPr>
+            <ns1:endParaRPr lang="en-US" dirty="0"/>
+          </ns1:p>
+        </ns0:txBody>
+      </ns0:sp>
+      <ns0:sp>
+        <ns0:nvSpPr>
+          <ns0:cNvPr id="4" name="Text 1"/>
+          <ns0:cNvSpPr/>
+          <ns0:nvPr/>
+        </ns0:nvSpPr>
+        <ns0:spPr>
+          <ns1:xfrm>
+            <ns1:off x="7461041" y="231577"/>
+            <ns1:ext cx="927071" cy="171450"/>
+          </ns1:xfrm>
+          <ns1:prstGeom prst="rect">
+            <ns1:avLst/>
+          </ns1:prstGeom>
+          <ns1:noFill/>
+          <ns1:ln/>
+        </ns0:spPr>
+        <ns0:txBody>
+          <ns1:bodyPr wrap="square" lIns="0" tIns="0" rIns="0" bIns="0" rtlCol="0" anchor="t"/>
+          <ns1:lstStyle/>
+          <ns1:p>
+            <ns1:pPr algn="ctr" indent="0" marL="0">
+              <ns1:buNone/>
+            </ns1:pPr>
+            <ns1:r>
+              <ns1:rPr lang="en-US" sz="1150" b="1" dirty="0">
+                <ns1:solidFill>
+                  <ns1:srgbClr val="FFFFFF"/>
+                </ns1:solidFill>
+                <ns1:latin typeface="Arial" pitchFamily="34" charset="0"/>
+                <ns1:ea typeface="Arial" pitchFamily="34" charset="-122"/>
+                <ns1:cs typeface="Arial" pitchFamily="34" charset="-120"/>
+              </ns1:rPr>
+              <ns1:t>CHAPTER 03</ns1:t>
+            </ns1:r>
+            <ns1:endParaRPr lang="en-US" sz="1150" dirty="0"/>
+          </ns1:p>
+        </ns0:txBody>
+      </ns0:sp>
+      <ns0:pic>
+        <ns0:nvPicPr>
+          <ns0:cNvPr id="5" name="Image 1" descr="Open this chapter on GitHub">
+            <ns1:hlinkClick ns3:id="rId3" tooltip="https://github.com/github/copilot-app-for-beginners/tree/main/03-development-workflows"/>
+          </ns0:cNvPr>
+          <ns0:cNvPicPr>
+            <ns1:picLocks noChangeAspect="1"/>
+          </ns0:cNvPicPr>
+          <ns0:nvPr/>
+        </ns0:nvPicPr>
+        <ns0:blipFill>
+          <ns1:blip ns3:embed="rId2"/>
+          <ns1:stretch>
+            <ns1:fillRect/>
+          </ns1:stretch>
+        </ns0:blipFill>
+        <ns0:spPr>
+          <ns1:xfrm>
+            <ns1:off x="8610600" y="165050"/>
+            <ns1:ext cx="304800" cy="304800"/>
+          </ns1:xfrm>
+          <ns1:prstGeom prst="rect">
+            <ns1:avLst/>
+          </ns1:prstGeom>
+        </ns0:spPr>
+      </ns0:pic>
+      <ns0:sp>
+        <ns0:nvSpPr>
+          <ns0:cNvPr id="6" name="Text 2"/>
+          <ns0:cNvSpPr/>
+          <ns0:nvPr/>
+        </ns0:nvSpPr>
+        <ns0:spPr>
+          <ns1:xfrm>
+            <ns1:off x="507950" y="381000"/>
+            <ns1:ext cx="8161020" cy="190500"/>
+          </ns1:xfrm>
+          <ns1:prstGeom prst="rect">
+            <ns1:avLst/>
+          </ns1:prstGeom>
+          <ns1:noFill/>
+          <ns1:ln/>
+        </ns0:spPr>
+        <ns0:txBody>
+          <ns1:bodyPr wrap="square" lIns="0" tIns="0" rIns="0" bIns="0" rtlCol="0" anchor="t"/>
+          <ns1:lstStyle/>
+          <ns1:p>
+            <ns1:pPr algn="l" indent="0" marL="0">
+              <ns1:buNone/>
+            </ns1:pPr>
+            <ns1:r>
+              <ns1:rPr lang="en-US" sz="1250" b="1" dirty="0">
+                <ns1:solidFill>
+                  <ns1:srgbClr val="8250DF"/>
+                </ns1:solidFill>
+                <ns1:latin typeface="Arial" pitchFamily="34" charset="0"/>
+                <ns1:ea typeface="Arial" pitchFamily="34" charset="-122"/>
+                <ns1:cs typeface="Arial" pitchFamily="34" charset="-120"/>
+              </ns1:rPr>
+              <ns1:t>ISSUES AND PULL REQUESTS</ns1:t>
+            </ns1:r>
+            <ns1:endParaRPr lang="en-US" sz="1250" dirty="0"/>
+          </ns1:p>
+        </ns0:txBody>
+      </ns0:sp>
+      <ns0:sp>
+        <ns0:nvSpPr>
+          <ns0:cNvPr id="7" name="Text 3"/>
+          <ns0:cNvSpPr/>
+          <ns0:nvPr/>
+        </ns0:nvSpPr>
+        <ns0:spPr>
+          <ns1:xfrm>
+            <ns1:off x="507950" y="622250"/>
+            <ns1:ext cx="8161020" cy="419100"/>
+          </ns1:xfrm>
+          <ns1:prstGeom prst="rect">
+            <ns1:avLst/>
+          </ns1:prstGeom>
+          <ns1:noFill/>
+          <ns1:ln/>
+        </ns0:spPr>
+        <ns0:txBody>
+          <ns1:bodyPr wrap="square" lIns="0" tIns="0" rIns="0" bIns="0" rtlCol="0" anchor="t"/>
+          <ns1:lstStyle/>
+          <ns1:p>
+            <ns1:pPr algn="l" indent="0" marL="0">
+              <ns1:lnSpc>
+                <ns1:spcPts val="3300"/>
+              </ns1:lnSpc>
+              <ns1:spcBef>
+                <ns1:spcPts val="400"/>
+              </ns1:spcBef>
+              <ns1:buNone/>
+            </ns1:pPr>
+            <ns1:r>
+              <ns1:rPr lang="en-US" sz="2800" b="1" dirty="0">
+                <ns1:solidFill>
+                  <ns1:srgbClr val="1F2328"/>
+                </ns1:solidFill>
+                <ns1:latin typeface="Arial" pitchFamily="34" charset="0"/>
+                <ns1:ea typeface="Arial" pitchFamily="34" charset="-122"/>
+                <ns1:cs typeface="Arial" pitchFamily="34" charset="-120"/>
+              </ns1:rPr>
+              <ns1:t>Find the course work</ns1:t>
+            </ns1:r>
+            <ns1:endParaRPr lang="en-US" sz="2800" dirty="0"/>
+          </ns1:p>
+        </ns0:txBody>
+      </ns0:sp>
+      <ns0:sp>
+        <ns0:nvSpPr>
+          <ns0:cNvPr id="8" name="Text 4"/>
+          <ns0:cNvSpPr/>
+          <ns0:nvPr/>
+        </ns0:nvSpPr>
+        <ns0:spPr>
+          <ns1:xfrm>
+            <ns1:off x="507950" y="1104751"/>
+            <ns1:ext cx="8161020" cy="254050"/>
+          </ns1:xfrm>
+          <ns1:prstGeom prst="rect">
+            <ns1:avLst/>
+          </ns1:prstGeom>
+          <ns1:noFill/>
+          <ns1:ln/>
+        </ns0:spPr>
+        <ns0:txBody>
+          <ns1:bodyPr wrap="square" lIns="0" tIns="0" rIns="0" bIns="0" rtlCol="0" anchor="t"/>
+          <ns1:lstStyle/>
+          <ns1:p>
+            <ns1:pPr algn="l" indent="0" marL="0">
+              <ns1:lnSpc>
+                <ns1:spcPts val="2000"/>
+              </ns1:lnSpc>
+              <ns1:spcBef>
+                <ns1:spcPts val="500"/>
+              </ns1:spcBef>
+              <ns1:buNone/>
+            </ns1:pPr>
+            <ns1:r>
+              <ns1:rPr lang="en-US" sz="1650" dirty="0">
+                <ns1:solidFill>
+                  <ns1:srgbClr val="59636E"/>
+                </ns1:solidFill>
+                <ns1:latin typeface="Arial" pitchFamily="34" charset="0"/>
+                <ns1:ea typeface="Arial" pitchFamily="34" charset="-122"/>
+                <ns1:cs typeface="Arial" pitchFamily="34" charset="-120"/>
+              </ns1:rPr>
+              <ns1:t>Use query filter mode to find your fork.</ns1:t>
+            </ns1:r>
+            <ns1:endParaRPr lang="en-US" sz="1650" dirty="0"/>
+          </ns1:p>
+        </ns0:txBody>
+      </ns0:sp>
+      <ns0:sp>
+        <ns0:nvSpPr>
+          <ns0:cNvPr id="9" name="Text 5"/>
+          <ns0:cNvSpPr/>
+          <ns0:nvPr/>
+        </ns0:nvSpPr>
+        <ns0:spPr>
+          <ns1:xfrm>
+            <ns1:off x="507950" y="1604814"/>
+            <ns1:ext cx="279350" cy="279350"/>
+          </ns1:xfrm>
+          <ns1:prstGeom prst="roundRect">
+            <ns1:avLst>
+              <ns1:gd name="adj" fmla="val 327331"/>
+            </ns1:avLst>
+          </ns1:prstGeom>
+          <ns1:solidFill>
+            <ns1:srgbClr val="8250DF"/>
+          </ns1:solidFill>
+          <ns1:ln/>
+        </ns0:spPr>
+        <ns0:txBody>
+          <ns1:bodyPr wrap="square" rtlCol="0" anchor="ctr"/>
+          <ns1:lstStyle/>
+          <ns1:p>
+            <ns1:pPr indent="0" marL="0">
+              <ns1:buNone/>
+            </ns1:pPr>
+            <ns1:endParaRPr lang="en-US" dirty="0"/>
+          </ns1:p>
+        </ns0:txBody>
+      </ns0:sp>
+      <ns0:sp>
+        <ns0:nvSpPr>
+          <ns0:cNvPr id="10" name="Text 6"/>
+          <ns0:cNvSpPr/>
+          <ns0:nvPr/>
+        </ns0:nvSpPr>
+        <ns0:spPr>
+          <ns1:xfrm>
+            <ns1:off x="602615" y="1649164"/>
+            <ns1:ext cx="90020" cy="190500"/>
+          </ns1:xfrm>
+          <ns1:prstGeom prst="rect">
+            <ns1:avLst/>
+          </ns1:prstGeom>
+          <ns1:noFill/>
+          <ns1:ln/>
+        </ns0:spPr>
+        <ns0:txBody>
+          <ns1:bodyPr wrap="square" lIns="0" tIns="0" rIns="0" bIns="0" rtlCol="0" anchor="t"/>
+          <ns1:lstStyle/>
+          <ns1:p>
+            <ns1:pPr algn="ctr" indent="0" marL="0">
+              <ns1:buNone/>
+            </ns1:pPr>
+            <ns1:r>
+              <ns1:rPr lang="en-US" sz="1250" b="1" dirty="0">
+                <ns1:solidFill>
+                  <ns1:srgbClr val="FFFFFF"/>
+                </ns1:solidFill>
+                <ns1:latin typeface="Arial" pitchFamily="34" charset="0"/>
+                <ns1:ea typeface="Arial" pitchFamily="34" charset="-122"/>
+                <ns1:cs typeface="Arial" pitchFamily="34" charset="-120"/>
+              </ns1:rPr>
+              <ns1:t>1</ns1:t>
+            </ns1:r>
+            <ns1:endParaRPr lang="en-US" sz="1250" dirty="0"/>
+          </ns1:p>
+        </ns0:txBody>
+      </ns0:sp>
+      <ns0:sp>
+        <ns0:nvSpPr>
+          <ns0:cNvPr id="11" name="Text 7"/>
+          <ns0:cNvSpPr/>
+          <ns0:nvPr/>
+        </ns0:nvSpPr>
+        <ns0:spPr>
+          <ns1:xfrm>
+            <ns1:off x="939701" y="1604814"/>
+            <ns1:ext cx="2798064" cy="222200"/>
+          </ns1:xfrm>
+          <ns1:prstGeom prst="rect">
+            <ns1:avLst/>
+          </ns1:prstGeom>
+          <ns1:noFill/>
+          <ns1:ln/>
+        </ns0:spPr>
+        <ns0:txBody>
+          <ns1:bodyPr wrap="square" lIns="0" tIns="0" rIns="0" bIns="0" rtlCol="0" anchor="t"/>
+          <ns1:lstStyle/>
+          <ns1:p>
+            <ns1:pPr algn="l" indent="0" marL="0">
+              <ns1:lnSpc>
+                <ns1:spcPts val="1750"/>
+              </ns1:lnSpc>
+              <ns1:buNone/>
+            </ns1:pPr>
+            <ns1:r>
+              <ns1:rPr lang="en-US" sz="1550" b="1" dirty="0">
+                <ns1:solidFill>
+                  <ns1:srgbClr val="1F2328"/>
+                </ns1:solidFill>
+                <ns1:latin typeface="Arial" pitchFamily="34" charset="0"/>
+                <ns1:ea typeface="Arial" pitchFamily="34" charset="-122"/>
+                <ns1:cs typeface="Arial" pitchFamily="34" charset="-120"/>
+              </ns1:rPr>
+              <ns1:t>Issues &gt; Assigned to me</ns1:t>
+            </ns1:r>
+            <ns1:endParaRPr lang="en-US" sz="1550" dirty="0"/>
+          </ns1:p>
+        </ns0:txBody>
+      </ns0:sp>
+      <ns0:sp>
+        <ns0:nvSpPr>
+          <ns0:cNvPr id="12" name="Text 8"/>
+          <ns0:cNvSpPr/>
+          <ns0:nvPr/>
+        </ns0:nvSpPr>
+        <ns0:spPr>
+          <ns1:xfrm>
+            <ns1:off x="939701" y="1852315"/>
+            <ns1:ext cx="2798064" cy="396180"/>
+          </ns1:xfrm>
+          <ns1:prstGeom prst="rect">
+            <ns1:avLst/>
+          </ns1:prstGeom>
+          <ns1:noFill/>
+          <ns1:ln/>
+        </ns0:spPr>
+        <ns0:txBody>
+          <ns1:bodyPr wrap="square" lIns="0" tIns="0" rIns="0" bIns="0" rtlCol="0" anchor="t"/>
+          <ns1:lstStyle/>
+          <ns1:p>
+            <ns1:pPr algn="l" indent="0" marL="0">
+              <ns1:lnSpc>
+                <ns1:spcPts val="1560"/>
+              </ns1:lnSpc>
+              <ns1:buNone/>
+            </ns1:pPr>
+            <ns1:r>
+              <ns1:rPr lang="en-US" sz="1350" dirty="0">
+                <ns1:solidFill>
+                  <ns1:srgbClr val="59636E"/>
+                </ns1:solidFill>
+                <ns1:latin typeface="Arial" pitchFamily="34" charset="0"/>
+                <ns1:ea typeface="Arial" pitchFamily="34" charset="-122"/>
+                <ns1:cs typeface="Arial" pitchFamily="34" charset="-120"/>
+              </ns1:rPr>
+              <ns1:t>Use repo:OWNER/copilot-app-for-beginners.</ns1:t>
+            </ns1:r>
+            <ns1:pPr algn="l" indent="0" marL="0">
+              <ns1:lnSpc>
+                <ns1:spcPts val="1560"/>
+              </ns1:lnSpc>
+              <ns1:buNone/>
+            </ns1:pPr>
+            <ns1:r>
+              <ns1:rPr lang="en-US" sz="1350" b="1" dirty="0">
+                <ns1:solidFill>
+                  <ns1:srgbClr val="59636E"/>
+                </ns1:solidFill>
+                <ns1:latin typeface="Arial" pitchFamily="34" charset="0"/>
+                <ns1:ea typeface="Arial" pitchFamily="34" charset="-122"/>
+                <ns1:cs typeface="Arial" pitchFamily="34" charset="-120"/>
+              </ns1:rPr>
+              <ns1:t/>
+            </ns1:r>
+            <ns1:pPr algn="l" indent="0" marL="0">
+              <ns1:lnSpc>
+                <ns1:spcPts val="1560"/>
+              </ns1:lnSpc>
+              <ns1:buNone/>
+            </ns1:pPr>
+            <ns1:r>
+              <ns1:rPr lang="en-US" sz="1350" dirty="0">
+                <ns1:solidFill>
+                  <ns1:srgbClr val="59636E"/>
+                </ns1:solidFill>
+                <ns1:latin typeface="Arial" pitchFamily="34" charset="0"/>
+                <ns1:ea typeface="Arial" pitchFamily="34" charset="-122"/>
+                <ns1:cs typeface="Arial" pitchFamily="34" charset="-120"/>
+              </ns1:rPr>
+              <ns1:t/>
+            </ns1:r>
+            <ns1:endParaRPr lang="en-US" sz="1350" dirty="0"/>
+          </ns1:p>
+        </ns0:txBody>
+      </ns0:sp>
+      <ns0:sp>
+        <ns0:nvSpPr>
+          <ns0:cNvPr id="13" name="Text 9"/>
+          <ns0:cNvSpPr/>
+          <ns0:nvPr/>
+        </ns0:nvSpPr>
+        <ns0:spPr>
+          <ns1:xfrm>
+            <ns1:off x="507950" y="2451646"/>
+            <ns1:ext cx="279350" cy="279350"/>
+          </ns1:xfrm>
+          <ns1:prstGeom prst="roundRect">
+            <ns1:avLst>
+              <ns1:gd name="adj" fmla="val 327331"/>
+            </ns1:avLst>
+          </ns1:prstGeom>
+          <ns1:solidFill>
+            <ns1:srgbClr val="8250DF"/>
+          </ns1:solidFill>
+          <ns1:ln/>
+        </ns0:spPr>
+        <ns0:txBody>
+          <ns1:bodyPr wrap="square" rtlCol="0" anchor="ctr"/>
+          <ns1:lstStyle/>
+          <ns1:p>
+            <ns1:pPr indent="0" marL="0">
+              <ns1:buNone/>
+            </ns1:pPr>
+            <ns1:endParaRPr lang="en-US" dirty="0"/>
+          </ns1:p>
+        </ns0:txBody>
+      </ns0:sp>
+      <ns0:sp>
+        <ns0:nvSpPr>
+          <ns0:cNvPr id="14" name="Text 10"/>
+          <ns0:cNvSpPr/>
+          <ns0:nvPr/>
+        </ns0:nvSpPr>
+        <ns0:spPr>
+          <ns1:xfrm>
+            <ns1:off x="602615" y="2495996"/>
+            <ns1:ext cx="90020" cy="190500"/>
+          </ns1:xfrm>
+          <ns1:prstGeom prst="rect">
+            <ns1:avLst/>
+          </ns1:prstGeom>
+          <ns1:noFill/>
+          <ns1:ln/>
+        </ns0:spPr>
+        <ns0:txBody>
+          <ns1:bodyPr wrap="square" lIns="0" tIns="0" rIns="0" bIns="0" rtlCol="0" anchor="t"/>
+          <ns1:lstStyle/>
+          <ns1:p>
+            <ns1:pPr algn="ctr" indent="0" marL="0">
+              <ns1:buNone/>
+            </ns1:pPr>
+            <ns1:r>
+              <ns1:rPr lang="en-US" sz="1250" b="1" dirty="0">
+                <ns1:solidFill>
+                  <ns1:srgbClr val="FFFFFF"/>
+                </ns1:solidFill>
+                <ns1:latin typeface="Arial" pitchFamily="34" charset="0"/>
+                <ns1:ea typeface="Arial" pitchFamily="34" charset="-122"/>
+                <ns1:cs typeface="Arial" pitchFamily="34" charset="-120"/>
+              </ns1:rPr>
+              <ns1:t>2</ns1:t>
+            </ns1:r>
+            <ns1:endParaRPr lang="en-US" sz="1250" dirty="0"/>
+          </ns1:p>
+        </ns0:txBody>
+      </ns0:sp>
+      <ns0:sp>
+        <ns0:nvSpPr>
+          <ns0:cNvPr id="15" name="Text 11"/>
+          <ns0:cNvSpPr/>
+          <ns0:nvPr/>
+        </ns0:nvSpPr>
+        <ns0:spPr>
+          <ns1:xfrm>
+            <ns1:off x="939701" y="2451646"/>
+            <ns1:ext cx="2798064" cy="444401"/>
+          </ns1:xfrm>
+          <ns1:prstGeom prst="rect">
+            <ns1:avLst/>
+          </ns1:prstGeom>
+          <ns1:noFill/>
+          <ns1:ln/>
+        </ns0:spPr>
+        <ns0:txBody>
+          <ns1:bodyPr wrap="square" lIns="0" tIns="0" rIns="0" bIns="0" rtlCol="0" anchor="t"/>
+          <ns1:lstStyle/>
+          <ns1:p>
+            <ns1:pPr algn="l" indent="0" marL="0">
+              <ns1:lnSpc>
+                <ns1:spcPts val="1750"/>
+              </ns1:lnSpc>
+              <ns1:buNone/>
+            </ns1:pPr>
+            <ns1:r>
+              <ns1:rPr lang="en-US" sz="1550" b="1" dirty="0">
+                <ns1:solidFill>
+                  <ns1:srgbClr val="1F2328"/>
+                </ns1:solidFill>
+                <ns1:latin typeface="Arial" pitchFamily="34" charset="0"/>
+                <ns1:ea typeface="Arial" pitchFamily="34" charset="-122"/>
+                <ns1:cs typeface="Arial" pitchFamily="34" charset="-120"/>
+              </ns1:rPr>
+              <ns1:t>Pull requests &gt; Authored by me</ns1:t>
+            </ns1:r>
+            <ns1:endParaRPr lang="en-US" sz="1550" dirty="0"/>
+          </ns1:p>
+        </ns0:txBody>
+      </ns0:sp>
+      <ns0:sp>
+        <ns0:nvSpPr>
+          <ns0:cNvPr id="16" name="Text 12"/>
+          <ns0:cNvSpPr/>
+          <ns0:nvPr/>
+        </ns0:nvSpPr>
+        <ns0:spPr>
+          <ns1:xfrm>
+            <ns1:off x="939701" y="2921347"/>
+            <ns1:ext cx="2798064" cy="198090"/>
+          </ns1:xfrm>
+          <ns1:prstGeom prst="rect">
+            <ns1:avLst/>
+          </ns1:prstGeom>
+          <ns1:noFill/>
+          <ns1:ln/>
+        </ns0:spPr>
+        <ns0:txBody>
+          <ns1:bodyPr wrap="square" lIns="0" tIns="0" rIns="0" bIns="0" rtlCol="0" anchor="t"/>
+          <ns1:lstStyle/>
+          <ns1:p>
+            <ns1:pPr algn="l" indent="0" marL="0">
+              <ns1:lnSpc>
+                <ns1:spcPts val="1560"/>
+              </ns1:lnSpc>
+              <ns1:buNone/>
+            </ns1:pPr>
+            <ns1:r>
+              <ns1:rPr lang="en-US" sz="1350" dirty="0">
+                <ns1:solidFill>
+                  <ns1:srgbClr val="59636E"/>
+                </ns1:solidFill>
+                <ns1:latin typeface="Arial" pitchFamily="34" charset="0"/>
+                <ns1:ea typeface="Arial" pitchFamily="34" charset="-122"/>
+                <ns1:cs typeface="Arial" pitchFamily="34" charset="-120"/>
+              </ns1:rPr>
+              <ns1:t>Use the same query in Pull requests.</ns1:t>
+            </ns1:r>
+            <ns1:endParaRPr lang="en-US" sz="1350" dirty="0"/>
+          </ns1:p>
+        </ns0:txBody>
+      </ns0:sp>
+      <ns0:sp>
+        <ns0:nvSpPr>
+          <ns0:cNvPr id="17" name="Text 13"/>
+          <ns0:cNvSpPr/>
+          <ns0:nvPr/>
+        </ns0:nvSpPr>
+        <ns0:spPr>
+          <ns1:xfrm>
+            <ns1:off x="507950" y="3325713"/>
+            <ns1:ext cx="2870150" cy="1212800"/>
+          </ns1:xfrm>
+          <ns1:prstGeom prst="roundRect">
+            <ns1:avLst>
+              <ns1:gd name="adj" fmla="val 6283"/>
+            </ns1:avLst>
+          </ns1:prstGeom>
+          <ns1:solidFill>
+            <ns1:srgbClr val="FFFFFF"/>
+          </ns1:solidFill>
+          <ns1:ln w="9525">
+            <ns1:solidFill>
+              <ns1:srgbClr val="D1D9E0"/>
+            </ns1:solidFill>
+          </ns1:ln>
+          <ns1:effectLst>
+            <ns1:outerShdw sx="100000" sy="100000" kx="0" ky="0" algn="bl" rotWithShape="0" blurRad="38100" dist="9525" dir="5400000">
+              <ns1:srgbClr val="1f2328">
+                <ns1:alpha val="12000"/>
+              </ns1:srgbClr>
+            </ns1:outerShdw>
+          </ns1:effectLst>
+        </ns0:spPr>
+        <ns0:txBody>
+          <ns1:bodyPr wrap="square" rtlCol="0" anchor="ctr"/>
+          <ns1:lstStyle/>
+          <ns1:p>
+            <ns1:pPr indent="0" marL="0">
+              <ns1:buNone/>
+            </ns1:pPr>
+            <ns1:endParaRPr lang="en-US" dirty="0"/>
+          </ns1:p>
+        </ns0:txBody>
+      </ns0:sp>
+      <ns0:pic>
+        <ns0:nvPicPr>
+          <ns0:cNvPr id="18" name="Image 2" descr="Issues query filter with callouts for query mode and repo:OWNER/copilot-app-for-beginners"/>
+          <ns0:cNvPicPr>
+            <ns1:picLocks noChangeAspect="1"/>
+          </ns0:cNvPicPr>
+          <ns0:nvPr/>
+        </ns0:nvPicPr>
+        <ns0:blipFill>
+          <ns1:blip ns3:embed="rId4"/>
+          <ns1:stretch>
+            <ns1:fillRect/>
+          </ns1:stretch>
+        </ns0:blipFill>
+        <ns0:spPr>
+          <ns1:xfrm>
+            <ns1:off x="555575" y="3373338"/>
+            <ns1:ext cx="2774900" cy="1117550"/>
+          </ns1:xfrm>
+          <ns1:prstGeom prst="rect">
+            <ns1:avLst/>
+          </ns1:prstGeom>
+        </ns0:spPr>
+      </ns0:pic>
+      <ns0:sp>
+        <ns0:nvSpPr>
+          <ns0:cNvPr id="19" name="Text 14"/>
+          <ns0:cNvSpPr/>
+          <ns0:nvPr/>
+        </ns0:nvSpPr>
+        <ns0:spPr>
+          <ns1:xfrm>
+            <ns1:off x="3939927" y="2078236"/>
+            <ns1:ext cx="4692551" cy="1989981"/>
+          </ns1:xfrm>
+          <ns1:prstGeom prst="roundRect">
+            <ns1:avLst>
+              <ns1:gd name="adj" fmla="val 3829"/>
+            </ns1:avLst>
+          </ns1:prstGeom>
+          <ns1:solidFill>
+            <ns1:srgbClr val="FFFFFF"/>
+          </ns1:solidFill>
+          <ns1:ln w="9525">
+            <ns1:solidFill>
+              <ns1:srgbClr val="D1D9E0"/>
+            </ns1:solidFill>
+          </ns1:ln>
+          <ns1:effectLst>
+            <ns1:outerShdw sx="100000" sy="100000" kx="0" ky="0" algn="bl" rotWithShape="0" blurRad="38100" dist="9525" dir="5400000">
+              <ns1:srgbClr val="1f2328">
+                <ns1:alpha val="12000"/>
+              </ns1:srgbClr>
+            </ns1:outerShdw>
+          </ns1:effectLst>
+        </ns0:spPr>
+        <ns0:txBody>
+          <ns1:bodyPr wrap="square" rtlCol="0" anchor="ctr"/>
+          <ns1:lstStyle/>
+          <ns1:p>
+            <ns1:pPr indent="0" marL="0">
+              <ns1:buNone/>
+            </ns1:pPr>
+            <ns1:endParaRPr lang="en-US" dirty="0"/>
+          </ns1:p>
+        </ns0:txBody>
+      </ns0:sp>
+      <ns0:pic>
+        <ns0:nvPicPr>
+          <ns0:cNvPr id="20" name="Image 3" descr="Issues view filtered to the course repository"/>
+          <ns0:cNvPicPr>
+            <ns1:picLocks noChangeAspect="1"/>
+          </ns0:cNvPicPr>
+          <ns0:nvPr/>
+        </ns0:nvPicPr>
+        <ns0:blipFill>
+          <ns1:blip ns3:embed="rId5"/>
+          <ns1:stretch>
+            <ns1:fillRect/>
+          </ns1:stretch>
+        </ns0:blipFill>
+        <ns0:spPr>
+          <ns1:xfrm>
+            <ns1:off x="3987552" y="2125861"/>
+            <ns1:ext cx="4597301" cy="1894731"/>
+          </ns1:xfrm>
+          <ns1:prstGeom prst="rect">
+            <ns1:avLst/>
+          </ns1:prstGeom>
+        </ns0:spPr>
+      </ns0:pic>
+    </ns0:spTree>
+  </ns0:cSld>
+  <ns0:clrMapOvr>
+    <ns1:masterClrMapping/>
+  </ns0:clrMapOvr>
+</ns0:sld>
 </file>
 
 <file path=ppt/slides/slide15.xml><?xml version="1.0" encoding="utf-8"?>
@@ -8005,7 +8005,7 @@
       </p:sp>
       <p:pic>
         <p:nvPicPr>
-          <p:cNvPr id="10" name="Image 2" descr="Pull request conversation with the empty-state copy comment">    </p:cNvPr>
+          <p:cNvPr id="10" name="Image 2" descr="Pull request conversation with the empty-state copy comment"/>
           <p:cNvPicPr>
             <a:picLocks noChangeAspect="1"/>
           </p:cNvPicPr>
@@ -8346,7 +8346,7 @@
       </p:sp>
       <p:pic>
         <p:nvPicPr>
-          <p:cNvPr id="21" name="Image 4" descr="Failing stats check practice pull request showing the failed Book app web validation check">    </p:cNvPr>
+          <p:cNvPr id="21" name="Image 4" descr="Failing stats check practice pull request showing the failed Book app web validation check"/>
           <p:cNvPicPr>
             <a:picLocks noChangeAspect="1"/>
           </p:cNvPicPr>
@@ -8936,7 +8936,7 @@
       </p:sp>
       <p:pic>
         <p:nvPicPr>
-          <p:cNvPr id="10" name="Image 2" descr="Human judgment stays in the loop">    </p:cNvPr>
+          <p:cNvPr id="10" name="Image 2" descr="Human judgment stays in the loop"/>
           <p:cNvPicPr>
             <a:picLocks noChangeAspect="1"/>
           </p:cNvPicPr>
@@ -12783,7 +12783,7 @@
       </p:sp>
       <p:pic>
         <p:nvPicPr>
-          <p:cNvPr id="9" name="Image 2" descr="Record, play back, and re-take analogy for the development loop">    </p:cNvPr>
+          <p:cNvPr id="9" name="Image 2" descr="Record, play back, and re-take analogy for the development loop"/>
           <p:cNvPicPr>
             <a:picLocks noChangeAspect="1"/>
           </p:cNvPicPr>
@@ -12993,7 +12993,7 @@
       </p:sp>
       <p:pic>
         <p:nvPicPr>
-          <p:cNvPr id="15" name="Image 4" descr="Producer review desk analogy for GitHub issues and pull requests">    </p:cNvPr>
+          <p:cNvPr id="15" name="Image 4" descr="Producer review desk analogy for GitHub issues and pull requests"/>
           <p:cNvPicPr>
             <a:picLocks noChangeAspect="1"/>
           </p:cNvPicPr>
@@ -13491,7 +13491,7 @@
       </p:sp>
       <p:pic>
         <p:nvPicPr>
-          <p:cNvPr id="10" name="Image 2" descr="Development loop. Inner loop on your machine: understand, change, inspect, test and build, and preview. Outer loop on GitHub: issue, pull request, feedback, checks, and merge. Human judgment applies to both loops.">    </p:cNvPr>
+          <p:cNvPr id="10" name="Image 2" descr="Development loop. Inner loop on your machine: understand, change, inspect, test and build, and preview. Outer loop on GitHub: issue, pull request, feedback, checks, and merge. Human judgment applies to both loops."/>
           <p:cNvPicPr>
             <a:picLocks noChangeAspect="1"/>
           </p:cNvPicPr>

--- a/slides/03-development-workflows.pptx
+++ b/slides/03-development-workflows.pptx
@@ -5085,7 +5085,7 @@
         </p:nvSpPr>
         <p:spPr>
           <a:xfrm>
-            <a:off x="711101" y="1571774"/>
+            <a:off x="711101" y="1937534"/>
             <a:ext cx="5570169" cy="209550"/>
           </a:xfrm>
           <a:prstGeom prst="rect">
@@ -5124,7 +5124,7 @@
         </p:nvSpPr>
         <p:spPr>
           <a:xfrm>
-            <a:off x="711101" y="1882825"/>
+            <a:off x="711101" y="2248585"/>
             <a:ext cx="5570169" cy="584150"/>
           </a:xfrm>
           <a:prstGeom prst="rect">
@@ -5169,7 +5169,7 @@
         </p:nvSpPr>
         <p:spPr>
           <a:xfrm>
-            <a:off x="711101" y="2670125"/>
+            <a:off x="711101" y="3035885"/>
             <a:ext cx="609600" cy="63401"/>
           </a:xfrm>
           <a:prstGeom prst="roundRect">
@@ -5190,48 +5190,6 @@
               <a:buNone/>
             </a:pPr>
             <a:endParaRPr lang="en-US" dirty="0"/>
-          </a:p>
-        </p:txBody>
-      </p:sp>
-      <p:sp>
-        <p:nvSpPr>
-          <p:cNvPr id="12" name="Text 8"/>
-          <p:cNvSpPr/>
-          <p:nvPr/>
-        </p:nvSpPr>
-        <p:spPr>
-          <a:xfrm>
-            <a:off x="711101" y="2936677"/>
-            <a:ext cx="5570169" cy="634901"/>
-          </a:xfrm>
-          <a:prstGeom prst="rect">
-            <a:avLst/>
-          </a:prstGeom>
-          <a:noFill/>
-          <a:ln/>
-        </p:spPr>
-        <p:txBody>
-          <a:bodyPr wrap="square" lIns="0" tIns="0" rIns="0" bIns="0" rtlCol="0" anchor="t"/>
-          <a:lstStyle/>
-          <a:p>
-            <a:pPr algn="l" indent="0" marL="0">
-              <a:lnSpc>
-                <a:spcPts val="2500"/>
-              </a:lnSpc>
-              <a:buNone/>
-            </a:pPr>
-            <a:r>
-              <a:rPr lang="en-US" sz="1900" dirty="0">
-                <a:solidFill>
-                  <a:srgbClr val="59636E"/>
-                </a:solidFill>
-                <a:latin typeface="Arial" pitchFamily="34" charset="0"/>
-                <a:ea typeface="Arial" pitchFamily="34" charset="-122"/>
-                <a:cs typeface="Arial" pitchFamily="34" charset="-120"/>
-              </a:rPr>
-              <a:t>Issue, pull request, review feedback, and checks. Merge only when everything agrees.</a:t>
-            </a:r>
-            <a:endParaRPr lang="en-US" sz="1900" dirty="0"/>
           </a:p>
         </p:txBody>
       </p:sp>
@@ -13454,8 +13412,8 @@
         </p:nvSpPr>
         <p:spPr>
           <a:xfrm>
-            <a:off x="511076" y="1831925"/>
-            <a:ext cx="3676650" cy="2482751"/>
+            <a:off x="2263140" y="1508760"/>
+            <a:ext cx="4617720" cy="3118104"/>
           </a:xfrm>
           <a:prstGeom prst="roundRect">
             <a:avLst>
@@ -13505,378 +13463,14 @@
         </p:blipFill>
         <p:spPr>
           <a:xfrm>
-            <a:off x="558701" y="1879550"/>
-            <a:ext cx="3581400" cy="2387501"/>
+            <a:off x="2308860" y="1554480"/>
+            <a:ext cx="4526280" cy="3017520"/>
           </a:xfrm>
           <a:prstGeom prst="rect">
             <a:avLst/>
           </a:prstGeom>
         </p:spPr>
       </p:pic>
-      <p:sp>
-        <p:nvSpPr>
-          <p:cNvPr id="11" name="Text 6"/>
-          <p:cNvSpPr/>
-          <p:nvPr/>
-        </p:nvSpPr>
-        <p:spPr>
-          <a:xfrm>
-            <a:off x="4444752" y="1574750"/>
-            <a:ext cx="4191149" cy="1409700"/>
-          </a:xfrm>
-          <a:prstGeom prst="roundRect">
-            <a:avLst>
-              <a:gd name="adj" fmla="val 9009"/>
-            </a:avLst>
-          </a:prstGeom>
-          <a:solidFill>
-            <a:srgbClr val="FFFFFF"/>
-          </a:solidFill>
-          <a:ln w="9525">
-            <a:solidFill>
-              <a:srgbClr val="9CD7FF"/>
-            </a:solidFill>
-          </a:ln>
-        </p:spPr>
-        <p:txBody>
-          <a:bodyPr wrap="square" rtlCol="0" anchor="ctr"/>
-          <a:lstStyle/>
-          <a:p>
-            <a:pPr indent="0" marL="0">
-              <a:buNone/>
-            </a:pPr>
-            <a:endParaRPr lang="en-US" dirty="0"/>
-          </a:p>
-        </p:txBody>
-      </p:sp>
-      <p:sp>
-        <p:nvSpPr>
-          <p:cNvPr id="12" name="Text 7"/>
-          <p:cNvSpPr/>
-          <p:nvPr/>
-        </p:nvSpPr>
-        <p:spPr>
-          <a:xfrm>
-            <a:off x="4631978" y="1761976"/>
-            <a:ext cx="381000" cy="381000"/>
-          </a:xfrm>
-          <a:prstGeom prst="roundRect">
-            <a:avLst>
-              <a:gd name="adj" fmla="val 23333"/>
-            </a:avLst>
-          </a:prstGeom>
-          <a:solidFill>
-            <a:srgbClr val="DDF4FF"/>
-          </a:solidFill>
-          <a:ln/>
-        </p:spPr>
-        <p:txBody>
-          <a:bodyPr wrap="square" rtlCol="0" anchor="ctr"/>
-          <a:lstStyle/>
-          <a:p>
-            <a:pPr indent="0" marL="0">
-              <a:buNone/>
-            </a:pPr>
-            <a:endParaRPr lang="en-US" dirty="0"/>
-          </a:p>
-        </p:txBody>
-      </p:sp>
-      <p:pic>
-        <p:nvPicPr>
-          <p:cNvPr id="13" name="Image 3" descr="">
-            <a:extLst>
-              <a:ext uri="{C183D7F6-B498-43B3-948B-1728B52AA6E4}">
-                <adec:decorative xmlns:adec="http://schemas.microsoft.com/office/drawing/2017/decorative" val="1"/>
-              </a:ext>
-            </a:extLst>
-          </p:cNvPr>
-          <p:cNvPicPr>
-            <a:picLocks noChangeAspect="1"/>
-          </p:cNvPicPr>
-          <p:nvPr/>
-        </p:nvPicPr>
-        <p:blipFill>
-          <a:blip r:embed="rId5"/>
-          <a:stretch>
-            <a:fillRect/>
-          </a:stretch>
-        </p:blipFill>
-        <p:spPr>
-          <a:xfrm>
-            <a:off x="4714577" y="1844576"/>
-            <a:ext cx="215801" cy="215801"/>
-          </a:xfrm>
-          <a:prstGeom prst="rect">
-            <a:avLst/>
-          </a:prstGeom>
-        </p:spPr>
-      </p:pic>
-      <p:sp>
-        <p:nvSpPr>
-          <p:cNvPr id="14" name="Text 8"/>
-          <p:cNvSpPr/>
-          <p:nvPr/>
-        </p:nvSpPr>
-        <p:spPr>
-          <a:xfrm>
-            <a:off x="5127278" y="1838176"/>
-            <a:ext cx="1033031" cy="228600"/>
-          </a:xfrm>
-          <a:prstGeom prst="rect">
-            <a:avLst/>
-          </a:prstGeom>
-          <a:noFill/>
-          <a:ln/>
-        </p:spPr>
-        <p:txBody>
-          <a:bodyPr wrap="square" lIns="0" tIns="0" rIns="0" bIns="0" rtlCol="0" anchor="t"/>
-          <a:lstStyle/>
-          <a:p>
-            <a:pPr algn="l" indent="0" marL="0">
-              <a:lnSpc>
-                <a:spcPts val="1800"/>
-              </a:lnSpc>
-              <a:buNone/>
-            </a:pPr>
-            <a:r>
-              <a:rPr lang="en-US" sz="1650" b="1" dirty="0">
-                <a:solidFill>
-                  <a:srgbClr val="1F2328"/>
-                </a:solidFill>
-                <a:latin typeface="Arial" pitchFamily="34" charset="0"/>
-                <a:ea typeface="Arial" pitchFamily="34" charset="-122"/>
-                <a:cs typeface="Arial" pitchFamily="34" charset="-120"/>
-              </a:rPr>
-              <a:t>Inner loop</a:t>
-            </a:r>
-            <a:endParaRPr lang="en-US" sz="1650" dirty="0"/>
-          </a:p>
-        </p:txBody>
-      </p:sp>
-      <p:sp>
-        <p:nvSpPr>
-          <p:cNvPr id="15" name="Text 9"/>
-          <p:cNvSpPr/>
-          <p:nvPr/>
-        </p:nvSpPr>
-        <p:spPr>
-          <a:xfrm>
-            <a:off x="4631978" y="2219176"/>
-            <a:ext cx="3893031" cy="429220"/>
-          </a:xfrm>
-          <a:prstGeom prst="rect">
-            <a:avLst/>
-          </a:prstGeom>
-          <a:noFill/>
-          <a:ln/>
-        </p:spPr>
-        <p:txBody>
-          <a:bodyPr wrap="square" lIns="0" tIns="0" rIns="0" bIns="0" rtlCol="0" anchor="t"/>
-          <a:lstStyle/>
-          <a:p>
-            <a:pPr algn="l" indent="0" marL="0">
-              <a:lnSpc>
-                <a:spcPts val="1690"/>
-              </a:lnSpc>
-              <a:buNone/>
-            </a:pPr>
-            <a:r>
-              <a:rPr lang="en-US" sz="1400" dirty="0">
-                <a:solidFill>
-                  <a:srgbClr val="59636E"/>
-                </a:solidFill>
-                <a:latin typeface="Arial" pitchFamily="34" charset="0"/>
-                <a:ea typeface="Arial" pitchFamily="34" charset="-122"/>
-                <a:cs typeface="Arial" pitchFamily="34" charset="-120"/>
-              </a:rPr>
-              <a:t>Understand, change, inspect, test, preview. Repeat.</a:t>
-            </a:r>
-            <a:endParaRPr lang="en-US" sz="1400" dirty="0"/>
-          </a:p>
-        </p:txBody>
-      </p:sp>
-      <p:sp>
-        <p:nvSpPr>
-          <p:cNvPr id="16" name="Text 10"/>
-          <p:cNvSpPr/>
-          <p:nvPr/>
-        </p:nvSpPr>
-        <p:spPr>
-          <a:xfrm>
-            <a:off x="4444752" y="3162151"/>
-            <a:ext cx="4191149" cy="1409700"/>
-          </a:xfrm>
-          <a:prstGeom prst="roundRect">
-            <a:avLst>
-              <a:gd name="adj" fmla="val 9009"/>
-            </a:avLst>
-          </a:prstGeom>
-          <a:solidFill>
-            <a:srgbClr val="FFFFFF"/>
-          </a:solidFill>
-          <a:ln w="9525">
-            <a:solidFill>
-              <a:srgbClr val="E0C5FF"/>
-            </a:solidFill>
-          </a:ln>
-        </p:spPr>
-        <p:txBody>
-          <a:bodyPr wrap="square" rtlCol="0" anchor="ctr"/>
-          <a:lstStyle/>
-          <a:p>
-            <a:pPr indent="0" marL="0">
-              <a:buNone/>
-            </a:pPr>
-            <a:endParaRPr lang="en-US" dirty="0"/>
-          </a:p>
-        </p:txBody>
-      </p:sp>
-      <p:sp>
-        <p:nvSpPr>
-          <p:cNvPr id="17" name="Text 11"/>
-          <p:cNvSpPr/>
-          <p:nvPr/>
-        </p:nvSpPr>
-        <p:spPr>
-          <a:xfrm>
-            <a:off x="4631978" y="3349377"/>
-            <a:ext cx="381000" cy="381000"/>
-          </a:xfrm>
-          <a:prstGeom prst="roundRect">
-            <a:avLst>
-              <a:gd name="adj" fmla="val 23333"/>
-            </a:avLst>
-          </a:prstGeom>
-          <a:solidFill>
-            <a:srgbClr val="FBEFFF"/>
-          </a:solidFill>
-          <a:ln/>
-        </p:spPr>
-        <p:txBody>
-          <a:bodyPr wrap="square" rtlCol="0" anchor="ctr"/>
-          <a:lstStyle/>
-          <a:p>
-            <a:pPr indent="0" marL="0">
-              <a:buNone/>
-            </a:pPr>
-            <a:endParaRPr lang="en-US" dirty="0"/>
-          </a:p>
-        </p:txBody>
-      </p:sp>
-      <p:pic>
-        <p:nvPicPr>
-          <p:cNvPr id="18" name="Image 4" descr="">
-            <a:extLst>
-              <a:ext uri="{C183D7F6-B498-43B3-948B-1728B52AA6E4}">
-                <adec:decorative xmlns:adec="http://schemas.microsoft.com/office/drawing/2017/decorative" val="1"/>
-              </a:ext>
-            </a:extLst>
-          </p:cNvPr>
-          <p:cNvPicPr>
-            <a:picLocks noChangeAspect="1"/>
-          </p:cNvPicPr>
-          <p:nvPr/>
-        </p:nvPicPr>
-        <p:blipFill>
-          <a:blip r:embed="rId6"/>
-          <a:stretch>
-            <a:fillRect/>
-          </a:stretch>
-        </p:blipFill>
-        <p:spPr>
-          <a:xfrm>
-            <a:off x="4714577" y="3431977"/>
-            <a:ext cx="215801" cy="215801"/>
-          </a:xfrm>
-          <a:prstGeom prst="rect">
-            <a:avLst/>
-          </a:prstGeom>
-        </p:spPr>
-      </p:pic>
-      <p:sp>
-        <p:nvSpPr>
-          <p:cNvPr id="19" name="Text 12"/>
-          <p:cNvSpPr/>
-          <p:nvPr/>
-        </p:nvSpPr>
-        <p:spPr>
-          <a:xfrm>
-            <a:off x="5127278" y="3425577"/>
-            <a:ext cx="1080546" cy="228600"/>
-          </a:xfrm>
-          <a:prstGeom prst="rect">
-            <a:avLst/>
-          </a:prstGeom>
-          <a:noFill/>
-          <a:ln/>
-        </p:spPr>
-        <p:txBody>
-          <a:bodyPr wrap="square" lIns="0" tIns="0" rIns="0" bIns="0" rtlCol="0" anchor="t"/>
-          <a:lstStyle/>
-          <a:p>
-            <a:pPr algn="l" indent="0" marL="0">
-              <a:lnSpc>
-                <a:spcPts val="1800"/>
-              </a:lnSpc>
-              <a:buNone/>
-            </a:pPr>
-            <a:r>
-              <a:rPr lang="en-US" sz="1650" b="1" dirty="0">
-                <a:solidFill>
-                  <a:srgbClr val="1F2328"/>
-                </a:solidFill>
-                <a:latin typeface="Arial" pitchFamily="34" charset="0"/>
-                <a:ea typeface="Arial" pitchFamily="34" charset="-122"/>
-                <a:cs typeface="Arial" pitchFamily="34" charset="-120"/>
-              </a:rPr>
-              <a:t>Outer loop</a:t>
-            </a:r>
-            <a:endParaRPr lang="en-US" sz="1650" dirty="0"/>
-          </a:p>
-        </p:txBody>
-      </p:sp>
-      <p:sp>
-        <p:nvSpPr>
-          <p:cNvPr id="20" name="Text 13"/>
-          <p:cNvSpPr/>
-          <p:nvPr/>
-        </p:nvSpPr>
-        <p:spPr>
-          <a:xfrm>
-            <a:off x="4631978" y="3806577"/>
-            <a:ext cx="3893031" cy="214610"/>
-          </a:xfrm>
-          <a:prstGeom prst="rect">
-            <a:avLst/>
-          </a:prstGeom>
-          <a:noFill/>
-          <a:ln/>
-        </p:spPr>
-        <p:txBody>
-          <a:bodyPr wrap="square" lIns="0" tIns="0" rIns="0" bIns="0" rtlCol="0" anchor="t"/>
-          <a:lstStyle/>
-          <a:p>
-            <a:pPr algn="l" indent="0" marL="0">
-              <a:lnSpc>
-                <a:spcPts val="1690"/>
-              </a:lnSpc>
-              <a:buNone/>
-            </a:pPr>
-            <a:r>
-              <a:rPr lang="en-US" sz="1400" dirty="0">
-                <a:solidFill>
-                  <a:srgbClr val="59636E"/>
-                </a:solidFill>
-                <a:latin typeface="Arial" pitchFamily="34" charset="0"/>
-                <a:ea typeface="Arial" pitchFamily="34" charset="-122"/>
-                <a:cs typeface="Arial" pitchFamily="34" charset="-120"/>
-              </a:rPr>
-              <a:t>Issue, pull request, feedback, checks, merge.</a:t>
-            </a:r>
-            <a:endParaRPr lang="en-US" sz="1400" dirty="0"/>
-          </a:p>
-        </p:txBody>
-      </p:sp>
     </p:spTree>
   </p:cSld>
   <p:clrMapOvr>
@@ -15318,7 +14912,7 @@
         </p:nvSpPr>
         <p:spPr>
           <a:xfrm>
-            <a:off x="711101" y="1279773"/>
+            <a:off x="711101" y="1645533"/>
             <a:ext cx="5570169" cy="209550"/>
           </a:xfrm>
           <a:prstGeom prst="rect">
@@ -15357,7 +14951,7 @@
         </p:nvSpPr>
         <p:spPr>
           <a:xfrm>
-            <a:off x="711101" y="1590824"/>
+            <a:off x="711101" y="1956584"/>
             <a:ext cx="5570169" cy="1168301"/>
           </a:xfrm>
           <a:prstGeom prst="rect">
@@ -15402,7 +14996,7 @@
         </p:nvSpPr>
         <p:spPr>
           <a:xfrm>
-            <a:off x="711101" y="2962275"/>
+            <a:off x="711101" y="3328035"/>
             <a:ext cx="609600" cy="63401"/>
           </a:xfrm>
           <a:prstGeom prst="roundRect">
@@ -15423,48 +15017,6 @@
               <a:buNone/>
             </a:pPr>
             <a:endParaRPr lang="en-US" dirty="0"/>
-          </a:p>
-        </p:txBody>
-      </p:sp>
-      <p:sp>
-        <p:nvSpPr>
-          <p:cNvPr id="12" name="Text 8"/>
-          <p:cNvSpPr/>
-          <p:nvPr/>
-        </p:nvSpPr>
-        <p:spPr>
-          <a:xfrm>
-            <a:off x="711101" y="3228826"/>
-            <a:ext cx="5570169" cy="634901"/>
-          </a:xfrm>
-          <a:prstGeom prst="rect">
-            <a:avLst/>
-          </a:prstGeom>
-          <a:noFill/>
-          <a:ln/>
-        </p:spPr>
-        <p:txBody>
-          <a:bodyPr wrap="square" lIns="0" tIns="0" rIns="0" bIns="0" rtlCol="0" anchor="t"/>
-          <a:lstStyle/>
-          <a:p>
-            <a:pPr algn="l" indent="0" marL="0">
-              <a:lnSpc>
-                <a:spcPts val="2500"/>
-              </a:lnSpc>
-              <a:buNone/>
-            </a:pPr>
-            <a:r>
-              <a:rPr lang="en-US" sz="1900" dirty="0">
-                <a:solidFill>
-                  <a:srgbClr val="59636E"/>
-                </a:solidFill>
-                <a:latin typeface="Arial" pitchFamily="34" charset="0"/>
-                <a:ea typeface="Arial" pitchFamily="34" charset="-122"/>
-                <a:cs typeface="Arial" pitchFamily="34" charset="-120"/>
-              </a:rPr>
-              <a:t>Plan, change, inspect, test, build, and preview. Repeat until the evidence is clean.</a:t>
-            </a:r>
-            <a:endParaRPr lang="en-US" sz="1900" dirty="0"/>
           </a:p>
         </p:txBody>
       </p:sp>

--- a/slides/03-development-workflows.pptx
+++ b/slides/03-development-workflows.pptx
@@ -5801,8 +5801,8 @@
         </ns0:nvSpPr>
         <ns0:spPr>
           <ns1:xfrm>
-            <ns1:off x="507950" y="1604814"/>
-            <ns1:ext cx="279350" cy="279350"/>
+            <ns1:off x="512064" y="3200400"/>
+            <ns1:ext cx="283464" cy="283464"/>
           </ns1:xfrm>
           <ns1:prstGeom prst="roundRect">
             <ns1:avLst>
@@ -5833,8 +5833,8 @@
         </ns0:nvSpPr>
         <ns0:spPr>
           <ns1:xfrm>
-            <ns1:off x="602615" y="1649164"/>
-            <ns1:ext cx="90020" cy="190500"/>
+            <ns1:off x="603504" y="3246120"/>
+            <ns1:ext cx="91440" cy="192024"/>
           </ns1:xfrm>
           <ns1:prstGeom prst="rect">
             <ns1:avLst/>
@@ -5872,8 +5872,8 @@
         </ns0:nvSpPr>
         <ns0:spPr>
           <ns1:xfrm>
-            <ns1:off x="939701" y="1604814"/>
-            <ns1:ext cx="2798064" cy="222200"/>
+            <ns1:off x="941832" y="3200400"/>
+            <ns1:ext cx="7406640" cy="265176"/>
           </ns1:xfrm>
           <ns1:prstGeom prst="rect">
             <ns1:avLst/>
@@ -5914,8 +5914,8 @@
         </ns0:nvSpPr>
         <ns0:spPr>
           <ns1:xfrm>
-            <ns1:off x="939701" y="1852315"/>
-            <ns1:ext cx="2798064" cy="396180"/>
+            <ns1:off x="941832" y="3493008"/>
+            <ns1:ext cx="7406640" cy="274320"/>
           </ns1:xfrm>
           <ns1:prstGeom prst="rect">
             <ns1:avLst/>
@@ -5990,8 +5990,8 @@
         </ns0:nvSpPr>
         <ns0:spPr>
           <ns1:xfrm>
-            <ns1:off x="507950" y="2451646"/>
-            <ns1:ext cx="279350" cy="279350"/>
+            <ns1:off x="512064" y="4005072"/>
+            <ns1:ext cx="283464" cy="283464"/>
           </ns1:xfrm>
           <ns1:prstGeom prst="roundRect">
             <ns1:avLst>
@@ -6022,8 +6022,8 @@
         </ns0:nvSpPr>
         <ns0:spPr>
           <ns1:xfrm>
-            <ns1:off x="602615" y="2495996"/>
-            <ns1:ext cx="90020" cy="190500"/>
+            <ns1:off x="603504" y="4050792"/>
+            <ns1:ext cx="91440" cy="192024"/>
           </ns1:xfrm>
           <ns1:prstGeom prst="rect">
             <ns1:avLst/>
@@ -6061,8 +6061,8 @@
         </ns0:nvSpPr>
         <ns0:spPr>
           <ns1:xfrm>
-            <ns1:off x="939701" y="2451646"/>
-            <ns1:ext cx="2798064" cy="444401"/>
+            <ns1:off x="941832" y="4005072"/>
+            <ns1:ext cx="7406640" cy="265176"/>
           </ns1:xfrm>
           <ns1:prstGeom prst="rect">
             <ns1:avLst/>
@@ -6103,8 +6103,8 @@
         </ns0:nvSpPr>
         <ns0:spPr>
           <ns1:xfrm>
-            <ns1:off x="939701" y="2921347"/>
-            <ns1:ext cx="2798064" cy="198090"/>
+            <ns1:off x="941832" y="4297680"/>
+            <ns1:ext cx="7406640" cy="274320"/>
           </ns1:xfrm>
           <ns1:prstGeom prst="rect">
             <ns1:avLst/>
@@ -6145,8 +6145,8 @@
         </ns0:nvSpPr>
         <ns0:spPr>
           <ns1:xfrm>
-            <ns1:off x="507950" y="3325713"/>
-            <ns1:ext cx="2870150" cy="1212800"/>
+            <ns1:off x="512064" y="1554480"/>
+            <ns1:ext cx="8119872" cy="1385496"/>
           </ns1:xfrm>
           <ns1:prstGeom prst="roundRect">
             <ns1:avLst>
@@ -6182,89 +6182,22 @@
       </ns0:sp>
       <ns0:pic>
         <ns0:nvPicPr>
-          <ns0:cNvPr id="18" name="Image 2" descr="Issues query filter with callouts for query mode and repo:OWNER/copilot-app-for-beginners"/>
+          <ns0:cNvPr id="18" name="Image 2" descr="Issues filter toolbar: filter icon, Query mode, and repository query. All three red callouts are visible."/>
           <ns0:cNvPicPr>
             <ns1:picLocks noChangeAspect="1"/>
           </ns0:cNvPicPr>
           <ns0:nvPr/>
         </ns0:nvPicPr>
         <ns0:blipFill>
-          <ns1:blip ns3:embed="rId4"/>
+          <ns1:blip ns3:embed="rId8"/>
           <ns1:stretch>
             <ns1:fillRect/>
           </ns1:stretch>
         </ns0:blipFill>
         <ns0:spPr>
           <ns1:xfrm>
-            <ns1:off x="555575" y="3373338"/>
-            <ns1:ext cx="2774900" cy="1117550"/>
-          </ns1:xfrm>
-          <ns1:prstGeom prst="rect">
-            <ns1:avLst/>
-          </ns1:prstGeom>
-        </ns0:spPr>
-      </ns0:pic>
-      <ns0:sp>
-        <ns0:nvSpPr>
-          <ns0:cNvPr id="19" name="Text 14"/>
-          <ns0:cNvSpPr/>
-          <ns0:nvPr/>
-        </ns0:nvSpPr>
-        <ns0:spPr>
-          <ns1:xfrm>
-            <ns1:off x="3939927" y="2078236"/>
-            <ns1:ext cx="4692551" cy="1989981"/>
-          </ns1:xfrm>
-          <ns1:prstGeom prst="roundRect">
-            <ns1:avLst>
-              <ns1:gd name="adj" fmla="val 3829"/>
-            </ns1:avLst>
-          </ns1:prstGeom>
-          <ns1:solidFill>
-            <ns1:srgbClr val="FFFFFF"/>
-          </ns1:solidFill>
-          <ns1:ln w="9525">
-            <ns1:solidFill>
-              <ns1:srgbClr val="D1D9E0"/>
-            </ns1:solidFill>
-          </ns1:ln>
-          <ns1:effectLst>
-            <ns1:outerShdw sx="100000" sy="100000" kx="0" ky="0" algn="bl" rotWithShape="0" blurRad="38100" dist="9525" dir="5400000">
-              <ns1:srgbClr val="1f2328">
-                <ns1:alpha val="12000"/>
-              </ns1:srgbClr>
-            </ns1:outerShdw>
-          </ns1:effectLst>
-        </ns0:spPr>
-        <ns0:txBody>
-          <ns1:bodyPr wrap="square" rtlCol="0" anchor="ctr"/>
-          <ns1:lstStyle/>
-          <ns1:p>
-            <ns1:pPr indent="0" marL="0">
-              <ns1:buNone/>
-            </ns1:pPr>
-            <ns1:endParaRPr lang="en-US" dirty="0"/>
-          </ns1:p>
-        </ns0:txBody>
-      </ns0:sp>
-      <ns0:pic>
-        <ns0:nvPicPr>
-          <ns0:cNvPr id="20" name="Image 3" descr="Issues view filtered to the course repository"/>
-          <ns0:cNvPicPr>
-            <ns1:picLocks noChangeAspect="1"/>
-          </ns0:cNvPicPr>
-          <ns0:nvPr/>
-        </ns0:nvPicPr>
-        <ns0:blipFill>
-          <ns1:blip ns3:embed="rId5"/>
-          <ns1:stretch>
-            <ns1:fillRect/>
-          </ns1:stretch>
-        </ns0:blipFill>
-        <ns0:spPr>
-          <ns1:xfrm>
-            <ns1:off x="3987552" y="2125861"/>
-            <ns1:ext cx="4597301" cy="1894731"/>
+            <ns1:off x="557784" y="1600200"/>
+            <ns1:ext cx="8028432" cy="1294056"/>
           </ns1:xfrm>
           <ns1:prstGeom prst="rect">
             <ns1:avLst/>
